--- a/DR/презентация.pptx
+++ b/DR/презентация.pptx
@@ -23,27 +23,23 @@
   <p:notesSz cx="6858000" cy="9144000"/>
   <p:embeddedFontLst>
     <p:embeddedFont>
-      <p:font typeface="Red Hat Display Bold" panose="020B0604020202020204" charset="0"/>
+      <p:font typeface="Red Hat Display" panose="020B0604020202020204" charset="0"/>
       <p:regular r:id="rId13"/>
     </p:embeddedFont>
     <p:embeddedFont>
-      <p:font typeface="Red Hat Display" panose="020B0604020202020204" charset="0"/>
+      <p:font typeface="Open Sans" panose="020B0604020202020204" charset="0"/>
       <p:regular r:id="rId14"/>
     </p:embeddedFont>
     <p:embeddedFont>
-      <p:font typeface="Open Sans Bold" panose="020B0604020202020204" charset="0"/>
+      <p:font typeface="Calibri" panose="020F0502020204030204" pitchFamily="34" charset="0"/>
       <p:regular r:id="rId15"/>
+      <p:bold r:id="rId16"/>
+      <p:italic r:id="rId17"/>
+      <p:boldItalic r:id="rId18"/>
     </p:embeddedFont>
     <p:embeddedFont>
-      <p:font typeface="Open Sans" panose="020B0604020202020204" charset="0"/>
-      <p:regular r:id="rId16"/>
-    </p:embeddedFont>
-    <p:embeddedFont>
-      <p:font typeface="Calibri" panose="020F0502020204030204" pitchFamily="34" charset="0"/>
-      <p:regular r:id="rId17"/>
-      <p:bold r:id="rId18"/>
-      <p:italic r:id="rId19"/>
-      <p:boldItalic r:id="rId20"/>
+      <p:font typeface="Open Sans Bold" panose="020B0604020202020204" charset="0"/>
+      <p:regular r:id="rId19"/>
     </p:embeddedFont>
   </p:embeddedFontLst>
   <p:defaultTextStyle>
@@ -242,7 +238,7 @@
           <a:p>
             <a:fld id="{BE55020F-7003-4703-AC9D-8EFB0C563F7C}" type="datetimeFigureOut">
               <a:rPr lang="bg-BG" smtClean="0"/>
-              <a:t>22.4.2026 г.</a:t>
+              <a:t>27.4.2026 г.</a:t>
             </a:fld>
             <a:endParaRPr lang="bg-BG"/>
           </a:p>
@@ -556,7 +552,23 @@
           <a:p>
             <a:r>
               <a:rPr lang="ru-RU" dirty="0" smtClean="0"/>
-              <a:t>Уважаема г-жо Директор, Уважаема комисия, уважаеми гости (ако има такива/или поименно – ако е едим конкретен гост)</a:t>
+              <a:t>Уважаема г-жо Директор, Уважаема комисия, уважаеми гости (ако има такива/или поименно – ако е </a:t>
+            </a:r>
+            <a:r>
+              <a:rPr lang="ru-RU" dirty="0" smtClean="0"/>
+              <a:t>еди</a:t>
+            </a:r>
+            <a:r>
+              <a:rPr lang="bg-BG" dirty="0" smtClean="0"/>
+              <a:t>н</a:t>
+            </a:r>
+            <a:r>
+              <a:rPr lang="ru-RU" dirty="0" smtClean="0"/>
+              <a:t> </a:t>
+            </a:r>
+            <a:r>
+              <a:rPr lang="ru-RU" dirty="0" smtClean="0"/>
+              <a:t>конкретен гост)</a:t>
             </a:r>
           </a:p>
           <a:p>
@@ -591,6 +603,14 @@
             </a:r>
           </a:p>
           <a:p>
+            <a:r>
+              <a:rPr lang="bg-BG" dirty="0" smtClean="0"/>
+              <a:t>Проектът</a:t>
+            </a:r>
+            <a:r>
+              <a:rPr lang="bg-BG" baseline="0" dirty="0" smtClean="0"/>
+              <a:t> представлява уеб приложение, което автоматично разпознава растителни видове с помощта на бързи и точни инструменти. </a:t>
+            </a:r>
             <a:endParaRPr lang="bg-BG" dirty="0"/>
           </a:p>
         </p:txBody>
@@ -793,7 +813,31 @@
                 <a:ea typeface="+mn-ea"/>
                 <a:cs typeface="+mn-cs"/>
               </a:rPr>
-              <a:t> В съвременния свят бързото разпознаване на флората е от ключово значение за специалисти и любители. Основната ми цел беше да създам модел, който не само класифицира изображенията с висока точност, но и работи достатъчно бързо, за да бъде интегриран в реално приложение. Стремях се да постигна баланс между сложността на невронната мрежа и ефективността на крайния софтуерен продукт.</a:t>
+              <a:t> В съвременния свят бързото разпознаване на флората е от ключово значение за специалисти и любители. </a:t>
+            </a:r>
+            <a:r>
+              <a:rPr lang="ru-RU" sz="1200" b="0" i="0" kern="1200" smtClean="0">
+                <a:solidFill>
+                  <a:schemeClr val="tx1"/>
+                </a:solidFill>
+                <a:effectLst/>
+                <a:latin typeface="+mn-lt"/>
+                <a:ea typeface="+mn-ea"/>
+                <a:cs typeface="+mn-cs"/>
+              </a:rPr>
+              <a:t>Създадох модел</a:t>
+            </a:r>
+            <a:r>
+              <a:rPr lang="ru-RU" sz="1200" b="0" i="0" kern="1200" dirty="0" smtClean="0">
+                <a:solidFill>
+                  <a:schemeClr val="tx1"/>
+                </a:solidFill>
+                <a:effectLst/>
+                <a:latin typeface="+mn-lt"/>
+                <a:ea typeface="+mn-ea"/>
+                <a:cs typeface="+mn-cs"/>
+              </a:rPr>
+              <a:t>, който не само класифицира изображенията с висока точност, но и работи достатъчно бързо, за да бъде интегриран в реално приложение. Стремях се да постигна баланс между сложността на невронната мрежа и ефективността на крайния софтуерен продукт.</a:t>
             </a:r>
             <a:endParaRPr lang="bg-BG" dirty="0"/>
           </a:p>
@@ -1548,7 +1592,55 @@
                 <a:ea typeface="+mn-ea"/>
                 <a:cs typeface="+mn-cs"/>
               </a:rPr>
-              <a:t>В заключение, проектът демонстрира силата на съвременните AI технологии. Като следваща стъпка планирам разширяване на базата данни с повече видове и добавяне на функционалност за разпознаване на болести по растенията. Това би превърнало приложението в още по-ценен помощник в земеделието. Благодаря за вниманието и съм готов да отговоря на вашите въпроси!</a:t>
+              <a:t>В заключение, проектът демонстрира силата на съвременните AI технологии. Като следваща стъпка планирам разширяване на базата данни с повече видове и добавяне на функционалност за разпознаване на болести по растенията. Това би превърнало приложението в още по-ценен помощник в земеделието. Благодаря за вниманието и съм </a:t>
+            </a:r>
+            <a:r>
+              <a:rPr lang="ru-RU" sz="1200" b="0" i="0" kern="1200" dirty="0" smtClean="0">
+                <a:solidFill>
+                  <a:schemeClr val="tx1"/>
+                </a:solidFill>
+                <a:effectLst/>
+                <a:latin typeface="+mn-lt"/>
+                <a:ea typeface="+mn-ea"/>
+                <a:cs typeface="+mn-cs"/>
+              </a:rPr>
+              <a:t>готов</a:t>
+            </a:r>
+            <a:r>
+              <a:rPr lang="bg-BG" sz="1200" b="0" i="0" kern="1200" dirty="0" smtClean="0">
+                <a:solidFill>
+                  <a:schemeClr val="tx1"/>
+                </a:solidFill>
+                <a:effectLst/>
+                <a:latin typeface="+mn-lt"/>
+                <a:ea typeface="+mn-ea"/>
+                <a:cs typeface="+mn-cs"/>
+              </a:rPr>
+              <a:t>а</a:t>
+            </a:r>
+            <a:r>
+              <a:rPr lang="ru-RU" sz="1200" b="0" i="0" kern="1200" dirty="0" smtClean="0">
+                <a:solidFill>
+                  <a:schemeClr val="tx1"/>
+                </a:solidFill>
+                <a:effectLst/>
+                <a:latin typeface="+mn-lt"/>
+                <a:ea typeface="+mn-ea"/>
+                <a:cs typeface="+mn-cs"/>
+              </a:rPr>
+              <a:t> </a:t>
+            </a:r>
+            <a:r>
+              <a:rPr lang="ru-RU" sz="1200" b="0" i="0" kern="1200" dirty="0" smtClean="0">
+                <a:solidFill>
+                  <a:schemeClr val="tx1"/>
+                </a:solidFill>
+                <a:effectLst/>
+                <a:latin typeface="+mn-lt"/>
+                <a:ea typeface="+mn-ea"/>
+                <a:cs typeface="+mn-cs"/>
+              </a:rPr>
+              <a:t>да отговоря на вашите въпроси!</a:t>
             </a:r>
             <a:endParaRPr lang="bg-BG" dirty="0"/>
           </a:p>
@@ -1772,7 +1864,7 @@
             <a:fld id="{1D8BD707-D9CF-40AE-B4C6-C98DA3205C09}" type="datetimeFigureOut">
               <a:rPr lang="en-US" smtClean="0"/>
               <a:pPr/>
-              <a:t>4/22/2026</a:t>
+              <a:t>4/27/2026</a:t>
             </a:fld>
             <a:endParaRPr lang="en-US"/>
           </a:p>
@@ -1939,7 +2031,7 @@
             <a:fld id="{1D8BD707-D9CF-40AE-B4C6-C98DA3205C09}" type="datetimeFigureOut">
               <a:rPr lang="en-US" smtClean="0"/>
               <a:pPr/>
-              <a:t>4/22/2026</a:t>
+              <a:t>4/27/2026</a:t>
             </a:fld>
             <a:endParaRPr lang="en-US"/>
           </a:p>
@@ -2116,7 +2208,7 @@
             <a:fld id="{1D8BD707-D9CF-40AE-B4C6-C98DA3205C09}" type="datetimeFigureOut">
               <a:rPr lang="en-US" smtClean="0"/>
               <a:pPr/>
-              <a:t>4/22/2026</a:t>
+              <a:t>4/27/2026</a:t>
             </a:fld>
             <a:endParaRPr lang="en-US"/>
           </a:p>
@@ -2283,7 +2375,7 @@
             <a:fld id="{1D8BD707-D9CF-40AE-B4C6-C98DA3205C09}" type="datetimeFigureOut">
               <a:rPr lang="en-US" smtClean="0"/>
               <a:pPr/>
-              <a:t>4/22/2026</a:t>
+              <a:t>4/27/2026</a:t>
             </a:fld>
             <a:endParaRPr lang="en-US"/>
           </a:p>
@@ -2526,7 +2618,7 @@
             <a:fld id="{1D8BD707-D9CF-40AE-B4C6-C98DA3205C09}" type="datetimeFigureOut">
               <a:rPr lang="en-US" smtClean="0"/>
               <a:pPr/>
-              <a:t>4/22/2026</a:t>
+              <a:t>4/27/2026</a:t>
             </a:fld>
             <a:endParaRPr lang="en-US"/>
           </a:p>
@@ -2811,7 +2903,7 @@
             <a:fld id="{1D8BD707-D9CF-40AE-B4C6-C98DA3205C09}" type="datetimeFigureOut">
               <a:rPr lang="en-US" smtClean="0"/>
               <a:pPr/>
-              <a:t>4/22/2026</a:t>
+              <a:t>4/27/2026</a:t>
             </a:fld>
             <a:endParaRPr lang="en-US"/>
           </a:p>
@@ -3230,7 +3322,7 @@
             <a:fld id="{1D8BD707-D9CF-40AE-B4C6-C98DA3205C09}" type="datetimeFigureOut">
               <a:rPr lang="en-US" smtClean="0"/>
               <a:pPr/>
-              <a:t>4/22/2026</a:t>
+              <a:t>4/27/2026</a:t>
             </a:fld>
             <a:endParaRPr lang="en-US"/>
           </a:p>
@@ -3345,7 +3437,7 @@
             <a:fld id="{1D8BD707-D9CF-40AE-B4C6-C98DA3205C09}" type="datetimeFigureOut">
               <a:rPr lang="en-US" smtClean="0"/>
               <a:pPr/>
-              <a:t>4/22/2026</a:t>
+              <a:t>4/27/2026</a:t>
             </a:fld>
             <a:endParaRPr lang="en-US"/>
           </a:p>
@@ -3437,7 +3529,7 @@
             <a:fld id="{1D8BD707-D9CF-40AE-B4C6-C98DA3205C09}" type="datetimeFigureOut">
               <a:rPr lang="en-US" smtClean="0"/>
               <a:pPr/>
-              <a:t>4/22/2026</a:t>
+              <a:t>4/27/2026</a:t>
             </a:fld>
             <a:endParaRPr lang="en-US"/>
           </a:p>
@@ -3711,7 +3803,7 @@
             <a:fld id="{1D8BD707-D9CF-40AE-B4C6-C98DA3205C09}" type="datetimeFigureOut">
               <a:rPr lang="en-US" smtClean="0"/>
               <a:pPr/>
-              <a:t>4/22/2026</a:t>
+              <a:t>4/27/2026</a:t>
             </a:fld>
             <a:endParaRPr lang="en-US"/>
           </a:p>
@@ -3961,7 +4053,7 @@
             <a:fld id="{1D8BD707-D9CF-40AE-B4C6-C98DA3205C09}" type="datetimeFigureOut">
               <a:rPr lang="en-US" smtClean="0"/>
               <a:pPr/>
-              <a:t>4/22/2026</a:t>
+              <a:t>4/27/2026</a:t>
             </a:fld>
             <a:endParaRPr lang="en-US"/>
           </a:p>
@@ -4171,7 +4263,7 @@
             <a:fld id="{1D8BD707-D9CF-40AE-B4C6-C98DA3205C09}" type="datetimeFigureOut">
               <a:rPr lang="en-US" smtClean="0"/>
               <a:pPr/>
-              <a:t>4/22/2026</a:t>
+              <a:t>4/27/2026</a:t>
             </a:fld>
             <a:endParaRPr lang="en-US"/>
           </a:p>
@@ -4584,7 +4676,7 @@
             <a:blip r:embed="rId3">
               <a:extLst>
                 <a:ext uri="{96DAC541-7B7A-43D3-8B79-37D633B846F1}">
-                  <asvg:svgBlip xmlns="" xmlns:asvg="http://schemas.microsoft.com/office/drawing/2016/SVG/main" r:embed="rId4"/>
+                  <asvg:svgBlip xmlns:asvg="http://schemas.microsoft.com/office/drawing/2016/SVG/main" xmlns="" r:embed="rId4"/>
                 </a:ext>
               </a:extLst>
             </a:blip>
@@ -4636,7 +4728,7 @@
             <a:blip r:embed="rId3">
               <a:extLst>
                 <a:ext uri="{96DAC541-7B7A-43D3-8B79-37D633B846F1}">
-                  <asvg:svgBlip xmlns="" xmlns:asvg="http://schemas.microsoft.com/office/drawing/2016/SVG/main" r:embed="rId4"/>
+                  <asvg:svgBlip xmlns:asvg="http://schemas.microsoft.com/office/drawing/2016/SVG/main" xmlns="" r:embed="rId4"/>
                 </a:ext>
               </a:extLst>
             </a:blip>
@@ -4801,7 +4893,7 @@
             <a:blip r:embed="rId5">
               <a:extLst>
                 <a:ext uri="{96DAC541-7B7A-43D3-8B79-37D633B846F1}">
-                  <asvg:svgBlip xmlns="" xmlns:asvg="http://schemas.microsoft.com/office/drawing/2016/SVG/main" r:embed="rId6"/>
+                  <asvg:svgBlip xmlns:asvg="http://schemas.microsoft.com/office/drawing/2016/SVG/main" xmlns="" r:embed="rId6"/>
                 </a:ext>
               </a:extLst>
             </a:blip>
@@ -4820,7 +4912,7 @@
         <p:spPr>
           <a:xfrm>
             <a:off x="11201400" y="8138092"/>
-            <a:ext cx="4759027" cy="423193"/>
+            <a:ext cx="4759027" cy="388248"/>
           </a:xfrm>
           <a:prstGeom prst="rect">
             <a:avLst/>
@@ -4842,9 +4934,9 @@
                 <a:solidFill>
                   <a:srgbClr val="49500F"/>
                 </a:solidFill>
-                <a:latin typeface="Red Hat Display"/>
+                <a:latin typeface="Times New Roman" panose="02020603050405020304" pitchFamily="18" charset="0"/>
                 <a:ea typeface="Red Hat Display"/>
-                <a:cs typeface="Red Hat Display"/>
+                <a:cs typeface="Times New Roman" panose="02020603050405020304" pitchFamily="18" charset="0"/>
                 <a:sym typeface="Red Hat Display"/>
               </a:rPr>
               <a:t>Дипломан</a:t>
@@ -4854,9 +4946,9 @@
                 <a:solidFill>
                   <a:srgbClr val="49500F"/>
                 </a:solidFill>
-                <a:latin typeface="Red Hat Display"/>
+                <a:latin typeface="Times New Roman" panose="02020603050405020304" pitchFamily="18" charset="0"/>
                 <a:ea typeface="Red Hat Display"/>
-                <a:cs typeface="Red Hat Display"/>
+                <a:cs typeface="Times New Roman" panose="02020603050405020304" pitchFamily="18" charset="0"/>
                 <a:sym typeface="Red Hat Display"/>
               </a:rPr>
               <a:t>т</a:t>
@@ -4866,9 +4958,9 @@
                 <a:solidFill>
                   <a:srgbClr val="49500F"/>
                 </a:solidFill>
-                <a:latin typeface="Red Hat Display"/>
+                <a:latin typeface="Times New Roman" panose="02020603050405020304" pitchFamily="18" charset="0"/>
                 <a:ea typeface="Red Hat Display"/>
-                <a:cs typeface="Red Hat Display"/>
+                <a:cs typeface="Times New Roman" panose="02020603050405020304" pitchFamily="18" charset="0"/>
                 <a:sym typeface="Red Hat Display"/>
               </a:rPr>
               <a:t>: </a:t>
@@ -4878,9 +4970,9 @@
                 <a:solidFill>
                   <a:srgbClr val="49500F"/>
                 </a:solidFill>
-                <a:latin typeface="Red Hat Display"/>
+                <a:latin typeface="Times New Roman" panose="02020603050405020304" pitchFamily="18" charset="0"/>
                 <a:ea typeface="Red Hat Display"/>
-                <a:cs typeface="Red Hat Display"/>
+                <a:cs typeface="Times New Roman" panose="02020603050405020304" pitchFamily="18" charset="0"/>
                 <a:sym typeface="Red Hat Display"/>
               </a:rPr>
               <a:t> </a:t>
@@ -4890,9 +4982,9 @@
                 <a:solidFill>
                   <a:srgbClr val="49500F"/>
                 </a:solidFill>
-                <a:latin typeface="Red Hat Display"/>
+                <a:latin typeface="Times New Roman" panose="02020603050405020304" pitchFamily="18" charset="0"/>
                 <a:ea typeface="Red Hat Display"/>
-                <a:cs typeface="Red Hat Display"/>
+                <a:cs typeface="Times New Roman" panose="02020603050405020304" pitchFamily="18" charset="0"/>
                 <a:sym typeface="Red Hat Display"/>
               </a:rPr>
               <a:t>Ива</a:t>
@@ -4902,9 +4994,9 @@
                 <a:solidFill>
                   <a:srgbClr val="49500F"/>
                 </a:solidFill>
-                <a:latin typeface="Red Hat Display"/>
+                <a:latin typeface="Times New Roman" panose="02020603050405020304" pitchFamily="18" charset="0"/>
                 <a:ea typeface="Red Hat Display"/>
-                <a:cs typeface="Red Hat Display"/>
+                <a:cs typeface="Times New Roman" panose="02020603050405020304" pitchFamily="18" charset="0"/>
                 <a:sym typeface="Red Hat Display"/>
               </a:rPr>
               <a:t> </a:t>
@@ -4914,9 +5006,9 @@
                 <a:solidFill>
                   <a:srgbClr val="49500F"/>
                 </a:solidFill>
-                <a:latin typeface="Red Hat Display"/>
+                <a:latin typeface="Times New Roman" panose="02020603050405020304" pitchFamily="18" charset="0"/>
                 <a:ea typeface="Red Hat Display"/>
-                <a:cs typeface="Red Hat Display"/>
+                <a:cs typeface="Times New Roman" panose="02020603050405020304" pitchFamily="18" charset="0"/>
                 <a:sym typeface="Red Hat Display"/>
               </a:rPr>
               <a:t>Колчагова</a:t>
@@ -4925,9 +5017,9 @@
               <a:solidFill>
                 <a:srgbClr val="49500F"/>
               </a:solidFill>
-              <a:latin typeface="Red Hat Display"/>
+              <a:latin typeface="Times New Roman" panose="02020603050405020304" pitchFamily="18" charset="0"/>
               <a:ea typeface="Red Hat Display"/>
-              <a:cs typeface="Red Hat Display"/>
+              <a:cs typeface="Times New Roman" panose="02020603050405020304" pitchFamily="18" charset="0"/>
               <a:sym typeface="Red Hat Display"/>
             </a:endParaRPr>
           </a:p>
@@ -4975,7 +5067,7 @@
             <a:blip r:embed="rId5">
               <a:extLst>
                 <a:ext uri="{96DAC541-7B7A-43D3-8B79-37D633B846F1}">
-                  <asvg:svgBlip xmlns="" xmlns:asvg="http://schemas.microsoft.com/office/drawing/2016/SVG/main" r:embed="rId6"/>
+                  <asvg:svgBlip xmlns:asvg="http://schemas.microsoft.com/office/drawing/2016/SVG/main" xmlns="" r:embed="rId6"/>
                 </a:ext>
               </a:extLst>
             </a:blip>
@@ -4994,7 +5086,7 @@
         <p:spPr>
           <a:xfrm>
             <a:off x="5126940" y="1358512"/>
-            <a:ext cx="8141115" cy="2066973"/>
+            <a:ext cx="8141115" cy="2103140"/>
           </a:xfrm>
           <a:prstGeom prst="rect">
             <a:avLst/>
@@ -5016,9 +5108,9 @@
                 <a:solidFill>
                   <a:srgbClr val="49500F"/>
                 </a:solidFill>
-                <a:latin typeface="Open Sans Bold"/>
+                <a:latin typeface="Times New Roman" panose="02020603050405020304" pitchFamily="18" charset="0"/>
                 <a:ea typeface="Open Sans Bold"/>
-                <a:cs typeface="Open Sans Bold"/>
+                <a:cs typeface="Times New Roman" panose="02020603050405020304" pitchFamily="18" charset="0"/>
                 <a:sym typeface="Open Sans Bold"/>
               </a:rPr>
               <a:t>ДЪРЖАВЕН ИЗПИТ ЗА ПРИДОБИВАНЕ НА ТРЕТА СТЕПЕН НА ПРОФЕСИОНАЛНА КВАЛИФИКАЦИЯ – ЧАСТ ПО ТЕПРИЯ</a:t>
@@ -5035,9 +5127,9 @@
                 <a:solidFill>
                   <a:srgbClr val="49500F"/>
                 </a:solidFill>
-                <a:latin typeface="Open Sans Bold"/>
+                <a:latin typeface="Times New Roman" panose="02020603050405020304" pitchFamily="18" charset="0"/>
                 <a:ea typeface="Open Sans Bold"/>
-                <a:cs typeface="Open Sans Bold"/>
+                <a:cs typeface="Times New Roman" panose="02020603050405020304" pitchFamily="18" charset="0"/>
                 <a:sym typeface="Open Sans Bold"/>
               </a:rPr>
               <a:t> НА ПРОЕКТА ПО ПРОФЕСИЯ КОД 481030 „ПРИЛОЖЕН ПРОГРАМИСТ“</a:t>
@@ -5054,9 +5146,9 @@
                 <a:solidFill>
                   <a:srgbClr val="49500F"/>
                 </a:solidFill>
-                <a:latin typeface="Open Sans Bold"/>
+                <a:latin typeface="Times New Roman" panose="02020603050405020304" pitchFamily="18" charset="0"/>
                 <a:ea typeface="Open Sans Bold"/>
-                <a:cs typeface="Open Sans Bold"/>
+                <a:cs typeface="Times New Roman" panose="02020603050405020304" pitchFamily="18" charset="0"/>
                 <a:sym typeface="Open Sans Bold"/>
               </a:rPr>
               <a:t> СПЕЦИАЛНОСТ КОД 4810301 „ ПРИЛОЖНО ПРОГРАМИРАНЕ“</a:t>
@@ -5092,7 +5184,7 @@
         <p:spPr>
           <a:xfrm>
             <a:off x="5869306" y="4776612"/>
-            <a:ext cx="6656384" cy="461665"/>
+            <a:ext cx="6656384" cy="423577"/>
           </a:xfrm>
           <a:prstGeom prst="rect">
             <a:avLst/>
@@ -5117,9 +5209,9 @@
                 <a:solidFill>
                   <a:srgbClr val="49500F"/>
                 </a:solidFill>
-                <a:latin typeface="Open Sans Bold"/>
+                <a:latin typeface="Times New Roman" panose="02020603050405020304" pitchFamily="18" charset="0"/>
                 <a:ea typeface="Open Sans Bold"/>
-                <a:cs typeface="Open Sans Bold"/>
+                <a:cs typeface="Times New Roman" panose="02020603050405020304" pitchFamily="18" charset="0"/>
                 <a:sym typeface="Open Sans Bold"/>
               </a:rPr>
               <a:t>Тема</a:t>
@@ -5129,9 +5221,9 @@
                 <a:solidFill>
                   <a:srgbClr val="49500F"/>
                 </a:solidFill>
-                <a:latin typeface="Open Sans"/>
+                <a:latin typeface="Times New Roman" panose="02020603050405020304" pitchFamily="18" charset="0"/>
                 <a:ea typeface="Open Sans"/>
-                <a:cs typeface="Open Sans"/>
+                <a:cs typeface="Times New Roman" panose="02020603050405020304" pitchFamily="18" charset="0"/>
                 <a:sym typeface="Open Sans"/>
               </a:rPr>
               <a:t>: </a:t>
@@ -5141,9 +5233,9 @@
                 <a:solidFill>
                   <a:srgbClr val="49500F"/>
                 </a:solidFill>
-                <a:latin typeface="Open Sans"/>
+                <a:latin typeface="Times New Roman" panose="02020603050405020304" pitchFamily="18" charset="0"/>
                 <a:ea typeface="Open Sans"/>
-                <a:cs typeface="Open Sans"/>
+                <a:cs typeface="Times New Roman" panose="02020603050405020304" pitchFamily="18" charset="0"/>
                 <a:sym typeface="Open Sans"/>
               </a:rPr>
               <a:t>Класификация на изображения</a:t>
@@ -5152,9 +5244,9 @@
               <a:solidFill>
                 <a:srgbClr val="49500F"/>
               </a:solidFill>
-              <a:latin typeface="Open Sans"/>
+              <a:latin typeface="Times New Roman" panose="02020603050405020304" pitchFamily="18" charset="0"/>
               <a:ea typeface="Open Sans"/>
-              <a:cs typeface="Open Sans"/>
+              <a:cs typeface="Times New Roman" panose="02020603050405020304" pitchFamily="18" charset="0"/>
               <a:sym typeface="Open Sans"/>
             </a:endParaRPr>
           </a:p>
@@ -5264,7 +5356,7 @@
             <a:blip r:embed="rId2">
               <a:extLst>
                 <a:ext uri="{96DAC541-7B7A-43D3-8B79-37D633B846F1}">
-                  <asvg:svgBlip xmlns="" xmlns:asvg="http://schemas.microsoft.com/office/drawing/2016/SVG/main" r:embed="rId3"/>
+                  <asvg:svgBlip xmlns:asvg="http://schemas.microsoft.com/office/drawing/2016/SVG/main" xmlns="" r:embed="rId3"/>
                 </a:ext>
               </a:extLst>
             </a:blip>
@@ -5316,7 +5408,7 @@
             <a:blip r:embed="rId2">
               <a:extLst>
                 <a:ext uri="{96DAC541-7B7A-43D3-8B79-37D633B846F1}">
-                  <asvg:svgBlip xmlns="" xmlns:asvg="http://schemas.microsoft.com/office/drawing/2016/SVG/main" r:embed="rId3"/>
+                  <asvg:svgBlip xmlns:asvg="http://schemas.microsoft.com/office/drawing/2016/SVG/main" xmlns="" r:embed="rId3"/>
                 </a:ext>
               </a:extLst>
             </a:blip>
@@ -5481,7 +5573,7 @@
             <a:blip r:embed="rId4">
               <a:extLst>
                 <a:ext uri="{96DAC541-7B7A-43D3-8B79-37D633B846F1}">
-                  <asvg:svgBlip xmlns="" xmlns:asvg="http://schemas.microsoft.com/office/drawing/2016/SVG/main" r:embed="rId5"/>
+                  <asvg:svgBlip xmlns:asvg="http://schemas.microsoft.com/office/drawing/2016/SVG/main" xmlns="" r:embed="rId5"/>
                 </a:ext>
               </a:extLst>
             </a:blip>
@@ -5533,7 +5625,7 @@
             <a:blip r:embed="rId4">
               <a:extLst>
                 <a:ext uri="{96DAC541-7B7A-43D3-8B79-37D633B846F1}">
-                  <asvg:svgBlip xmlns="" xmlns:asvg="http://schemas.microsoft.com/office/drawing/2016/SVG/main" r:embed="rId5"/>
+                  <asvg:svgBlip xmlns:asvg="http://schemas.microsoft.com/office/drawing/2016/SVG/main" xmlns="" r:embed="rId5"/>
                 </a:ext>
               </a:extLst>
             </a:blip>
@@ -5572,9 +5664,9 @@
                     <a:lumMod val="50000"/>
                   </a:schemeClr>
                 </a:solidFill>
-                <a:latin typeface="Open Sans" panose="020B0604020202020204" charset="0"/>
+                <a:latin typeface="Times New Roman" panose="02020603050405020304" pitchFamily="18" charset="0"/>
                 <a:ea typeface="Open Sans" panose="020B0604020202020204" charset="0"/>
-                <a:cs typeface="Open Sans" panose="020B0604020202020204" charset="0"/>
+                <a:cs typeface="Times New Roman" panose="02020603050405020304" pitchFamily="18" charset="0"/>
               </a:rPr>
               <a:t>Благодаря за вниманието!</a:t>
             </a:r>
@@ -5584,9 +5676,9 @@
                   <a:lumMod val="50000"/>
                 </a:schemeClr>
               </a:solidFill>
-              <a:latin typeface="Open Sans" panose="020B0604020202020204" charset="0"/>
+              <a:latin typeface="Times New Roman" panose="02020603050405020304" pitchFamily="18" charset="0"/>
               <a:ea typeface="Open Sans" panose="020B0604020202020204" charset="0"/>
-              <a:cs typeface="Open Sans" panose="020B0604020202020204" charset="0"/>
+              <a:cs typeface="Times New Roman" panose="02020603050405020304" pitchFamily="18" charset="0"/>
             </a:endParaRPr>
           </a:p>
         </p:txBody>
@@ -5782,6 +5874,42 @@
           </p:txBody>
         </p:sp>
       </p:grpSp>
+      <p:sp>
+        <p:nvSpPr>
+          <p:cNvPr id="8" name="TextBox 7"/>
+          <p:cNvSpPr txBox="1"/>
+          <p:nvPr/>
+        </p:nvSpPr>
+        <p:spPr>
+          <a:xfrm>
+            <a:off x="6030279" y="221962"/>
+            <a:ext cx="3276600" cy="584775"/>
+          </a:xfrm>
+          <a:prstGeom prst="rect">
+            <a:avLst/>
+          </a:prstGeom>
+          <a:noFill/>
+        </p:spPr>
+        <p:txBody>
+          <a:bodyPr wrap="square" rtlCol="0">
+            <a:spAutoFit/>
+          </a:bodyPr>
+          <a:lstStyle/>
+          <a:p>
+            <a:r>
+              <a:rPr lang="bg-BG" sz="3200" dirty="0" smtClean="0">
+                <a:latin typeface="Times New Roman" panose="02020603050405020304" pitchFamily="18" charset="0"/>
+                <a:cs typeface="Times New Roman" panose="02020603050405020304" pitchFamily="18" charset="0"/>
+              </a:rPr>
+              <a:t>Цел на проекта</a:t>
+            </a:r>
+            <a:endParaRPr lang="bg-BG" sz="3200" dirty="0">
+              <a:latin typeface="Times New Roman" panose="02020603050405020304" pitchFamily="18" charset="0"/>
+              <a:cs typeface="Times New Roman" panose="02020603050405020304" pitchFamily="18" charset="0"/>
+            </a:endParaRPr>
+          </a:p>
+        </p:txBody>
+      </p:sp>
     </p:spTree>
   </p:cSld>
   <p:clrMapOvr>
@@ -5822,7 +5950,7 @@
         </p:nvGrpSpPr>
         <p:grpSpPr>
           <a:xfrm>
-            <a:off x="0" y="0"/>
+            <a:off x="18143" y="-1"/>
             <a:ext cx="16459200" cy="1028700"/>
             <a:chOff x="0" y="0"/>
             <a:chExt cx="4334933" cy="270933"/>
@@ -5988,7 +6116,7 @@
         </p:nvSpPr>
         <p:spPr>
           <a:xfrm>
-            <a:off x="1981200" y="1142518"/>
+            <a:off x="4419600" y="221961"/>
             <a:ext cx="15544800" cy="584775"/>
           </a:xfrm>
           <a:prstGeom prst="rect">
@@ -6004,16 +6132,16 @@
           <a:p>
             <a:r>
               <a:rPr lang="ru-RU" sz="3200" b="1" dirty="0">
-                <a:latin typeface="Open Sans" panose="020B0604020202020204" charset="0"/>
+                <a:latin typeface="Times New Roman" panose="02020603050405020304" pitchFamily="18" charset="0"/>
                 <a:ea typeface="Open Sans" panose="020B0604020202020204" charset="0"/>
-                <a:cs typeface="Open Sans" panose="020B0604020202020204" charset="0"/>
+                <a:cs typeface="Times New Roman" panose="02020603050405020304" pitchFamily="18" charset="0"/>
               </a:rPr>
-              <a:t>Защо е необходимо това приложение? Бързина, точност и достъпност.</a:t>
+              <a:t>Защо е необходимо това приложение? </a:t>
             </a:r>
             <a:endParaRPr lang="bg-BG" sz="3200" b="1" dirty="0">
-              <a:latin typeface="Open Sans" panose="020B0604020202020204" charset="0"/>
+              <a:latin typeface="Times New Roman" panose="02020603050405020304" pitchFamily="18" charset="0"/>
               <a:ea typeface="Open Sans" panose="020B0604020202020204" charset="0"/>
-              <a:cs typeface="Open Sans" panose="020B0604020202020204" charset="0"/>
+              <a:cs typeface="Times New Roman" panose="02020603050405020304" pitchFamily="18" charset="0"/>
             </a:endParaRPr>
           </a:p>
         </p:txBody>
@@ -6217,8 +6345,8 @@
         </p:nvSpPr>
         <p:spPr>
           <a:xfrm>
-            <a:off x="4724400" y="1028700"/>
-            <a:ext cx="8250977" cy="584775"/>
+            <a:off x="4572000" y="221962"/>
+            <a:ext cx="7761035" cy="584775"/>
           </a:xfrm>
           <a:prstGeom prst="rect">
             <a:avLst/>
@@ -6233,90 +6361,75 @@
           <a:p>
             <a:r>
               <a:rPr lang="bg-BG" sz="3200" b="1" dirty="0">
-                <a:latin typeface="Open Sans" panose="020B0604020202020204" charset="0"/>
+                <a:latin typeface="Times New Roman" panose="02020603050405020304" pitchFamily="18" charset="0"/>
                 <a:ea typeface="Open Sans" panose="020B0604020202020204" charset="0"/>
-                <a:cs typeface="Open Sans" panose="020B0604020202020204" charset="0"/>
+                <a:cs typeface="Times New Roman" panose="02020603050405020304" pitchFamily="18" charset="0"/>
               </a:rPr>
               <a:t>Използване на </a:t>
             </a:r>
             <a:r>
               <a:rPr lang="en-US" sz="3200" b="1" dirty="0">
-                <a:latin typeface="Open Sans" panose="020B0604020202020204" charset="0"/>
+                <a:latin typeface="Times New Roman" panose="02020603050405020304" pitchFamily="18" charset="0"/>
                 <a:ea typeface="Open Sans" panose="020B0604020202020204" charset="0"/>
-                <a:cs typeface="Open Sans" panose="020B0604020202020204" charset="0"/>
+                <a:cs typeface="Times New Roman" panose="02020603050405020304" pitchFamily="18" charset="0"/>
               </a:rPr>
               <a:t>CNN </a:t>
             </a:r>
             <a:r>
               <a:rPr lang="bg-BG" sz="3200" b="1" dirty="0">
-                <a:latin typeface="Open Sans" panose="020B0604020202020204" charset="0"/>
+                <a:latin typeface="Times New Roman" panose="02020603050405020304" pitchFamily="18" charset="0"/>
                 <a:ea typeface="Open Sans" panose="020B0604020202020204" charset="0"/>
-                <a:cs typeface="Open Sans" panose="020B0604020202020204" charset="0"/>
+                <a:cs typeface="Times New Roman" panose="02020603050405020304" pitchFamily="18" charset="0"/>
               </a:rPr>
               <a:t>и </a:t>
             </a:r>
             <a:r>
               <a:rPr lang="en-US" sz="3200" b="1" dirty="0">
-                <a:latin typeface="Open Sans" panose="020B0604020202020204" charset="0"/>
+                <a:latin typeface="Times New Roman" panose="02020603050405020304" pitchFamily="18" charset="0"/>
                 <a:ea typeface="Open Sans" panose="020B0604020202020204" charset="0"/>
-                <a:cs typeface="Open Sans" panose="020B0604020202020204" charset="0"/>
+                <a:cs typeface="Times New Roman" panose="02020603050405020304" pitchFamily="18" charset="0"/>
               </a:rPr>
               <a:t>Transfer Learning. </a:t>
             </a:r>
             <a:endParaRPr lang="bg-BG" sz="3200" b="1" dirty="0">
-              <a:latin typeface="Open Sans" panose="020B0604020202020204" charset="0"/>
+              <a:latin typeface="Times New Roman" panose="02020603050405020304" pitchFamily="18" charset="0"/>
               <a:ea typeface="Open Sans" panose="020B0604020202020204" charset="0"/>
-              <a:cs typeface="Open Sans" panose="020B0604020202020204" charset="0"/>
+              <a:cs typeface="Times New Roman" panose="02020603050405020304" pitchFamily="18" charset="0"/>
             </a:endParaRPr>
           </a:p>
         </p:txBody>
       </p:sp>
       <p:pic>
         <p:nvPicPr>
-          <p:cNvPr id="1028" name="Picture 4" descr="Fruit Image Classification Model Based on MobileNetV2 with Deep Transfer  Learning Technique"/>
+          <p:cNvPr id="9" name="Picture 8"/>
           <p:cNvPicPr>
-            <a:picLocks noChangeAspect="1" noChangeArrowheads="1"/>
+            <a:picLocks noChangeAspect="1"/>
           </p:cNvPicPr>
           <p:nvPr/>
         </p:nvPicPr>
         <p:blipFill>
-          <a:blip r:embed="rId3" cstate="print">
+          <a:blip r:embed="rId3">
             <a:extLst>
               <a:ext uri="{28A0092B-C50C-407E-A947-70E740481C1C}">
                 <a14:useLocalDpi xmlns:a14="http://schemas.microsoft.com/office/drawing/2010/main" val="0"/>
               </a:ext>
             </a:extLst>
           </a:blip>
-          <a:srcRect/>
           <a:stretch>
             <a:fillRect/>
           </a:stretch>
         </p:blipFill>
-        <p:spPr bwMode="auto">
+        <p:spPr>
           <a:xfrm>
-            <a:off x="3581400" y="2476500"/>
-            <a:ext cx="10972800" cy="6906577"/>
+            <a:off x="1523187" y="1237962"/>
+            <a:ext cx="13868400" cy="9036338"/>
           </a:xfrm>
           <a:prstGeom prst="rect">
             <a:avLst/>
           </a:prstGeom>
-          <a:noFill/>
-          <a:ln>
-            <a:solidFill>
-              <a:schemeClr val="accent3">
-                <a:lumMod val="50000"/>
-              </a:schemeClr>
-            </a:solidFill>
+          <a:ln w="3175">
+            <a:noFill/>
           </a:ln>
-          <a:extLst>
-            <a:ext uri="{909E8E84-426E-40DD-AFC4-6F175D3DCCD1}">
-              <a14:hiddenFill xmlns:a14="http://schemas.microsoft.com/office/drawing/2010/main">
-                <a:solidFill>
-                  <a:srgbClr val="FFFFFF"/>
-                </a:solidFill>
-              </a14:hiddenFill>
-            </a:ext>
-          </a:extLst>
         </p:spPr>
       </p:pic>
     </p:spTree>
@@ -6512,9 +6625,9 @@
       </p:grpSp>
       <p:pic>
         <p:nvPicPr>
-          <p:cNvPr id="2050" name="Picture 2" descr="What Is Transfer Learning? [Examples &amp; Newbie-Friendly Guide]"/>
+          <p:cNvPr id="8" name="Picture 7"/>
           <p:cNvPicPr>
-            <a:picLocks noChangeAspect="1" noChangeArrowheads="1"/>
+            <a:picLocks noChangeAspect="1"/>
           </p:cNvPicPr>
           <p:nvPr/>
         </p:nvPicPr>
@@ -6526,44 +6639,18 @@
               </a:ext>
             </a:extLst>
           </a:blip>
-          <a:srcRect/>
           <a:stretch>
             <a:fillRect/>
           </a:stretch>
         </p:blipFill>
-        <p:spPr bwMode="auto">
+        <p:spPr>
           <a:xfrm>
-            <a:off x="3962400" y="2324100"/>
-            <a:ext cx="10548079" cy="6223242"/>
+            <a:off x="1828800" y="1028700"/>
+            <a:ext cx="14782800" cy="9258300"/>
           </a:xfrm>
           <a:prstGeom prst="rect">
             <a:avLst/>
           </a:prstGeom>
-          <a:ln w="38100" cap="sq">
-            <a:solidFill>
-              <a:schemeClr val="accent3">
-                <a:lumMod val="50000"/>
-              </a:schemeClr>
-            </a:solidFill>
-            <a:prstDash val="solid"/>
-            <a:miter lim="800000"/>
-          </a:ln>
-          <a:effectLst>
-            <a:outerShdw blurRad="50800" dist="38100" dir="2700000" algn="tl" rotWithShape="0">
-              <a:srgbClr val="000000">
-                <a:alpha val="43000"/>
-              </a:srgbClr>
-            </a:outerShdw>
-          </a:effectLst>
-          <a:extLst>
-            <a:ext uri="{909E8E84-426E-40DD-AFC4-6F175D3DCCD1}">
-              <a14:hiddenFill xmlns:a14="http://schemas.microsoft.com/office/drawing/2010/main">
-                <a:solidFill>
-                  <a:srgbClr val="FFFFFF"/>
-                </a:solidFill>
-              </a14:hiddenFill>
-            </a:ext>
-          </a:extLst>
         </p:spPr>
       </p:pic>
     </p:spTree>
@@ -6759,73 +6846,13 @@
       </p:grpSp>
       <p:sp>
         <p:nvSpPr>
-          <p:cNvPr id="10" name="TextBox 10"/>
-          <p:cNvSpPr txBox="1"/>
-          <p:nvPr/>
-        </p:nvSpPr>
-        <p:spPr>
-          <a:xfrm>
-            <a:off x="1433582" y="4841073"/>
-            <a:ext cx="6984352" cy="2830326"/>
-          </a:xfrm>
-          <a:prstGeom prst="rect">
-            <a:avLst/>
-          </a:prstGeom>
-        </p:spPr>
-        <p:txBody>
-          <a:bodyPr lIns="0" tIns="0" rIns="0" bIns="0" rtlCol="0" anchor="t">
-            <a:spAutoFit/>
-          </a:bodyPr>
-          <a:lstStyle/>
-          <a:p>
-            <a:pPr algn="just">
-              <a:lnSpc>
-                <a:spcPts val="2808"/>
-              </a:lnSpc>
-            </a:pPr>
-            <a:r>
-              <a:rPr lang="en-US" sz="2005" b="1">
-                <a:solidFill>
-                  <a:srgbClr val="FFFFFF"/>
-                </a:solidFill>
-                <a:latin typeface="Red Hat Display Bold"/>
-                <a:ea typeface="Red Hat Display Bold"/>
-                <a:cs typeface="Red Hat Display Bold"/>
-                <a:sym typeface="Red Hat Display Bold"/>
-              </a:rPr>
-              <a:t>Phase  1 :</a:t>
-            </a:r>
-          </a:p>
-          <a:p>
-            <a:pPr algn="just">
-              <a:lnSpc>
-                <a:spcPts val="2808"/>
-              </a:lnSpc>
-            </a:pPr>
-            <a:r>
-              <a:rPr lang="en-US" sz="2005">
-                <a:solidFill>
-                  <a:srgbClr val="FFFFFF"/>
-                </a:solidFill>
-                <a:latin typeface="Red Hat Display"/>
-                <a:ea typeface="Red Hat Display"/>
-                <a:cs typeface="Red Hat Display"/>
-                <a:sym typeface="Red Hat Display"/>
-              </a:rPr>
-              <a:t>Lorem ipsum dolor sit amet, consectetur adipiscing elit. Quisque non elit mauris. Cras euismod, metus ac finibus finibus, felis dui suscipit purus, a maximus leo ligula at dolor. Morbi et malesuada purus. Phasellus a lacus sit amet urna tempor sollicitudin. Cras pretium tempor elit blandit egestas. Donec sed dignissim augue. Suspendisse ac vulputate leo. Cras aliquet nunc ac velit cursus viverra. </a:t>
-            </a:r>
-          </a:p>
-        </p:txBody>
-      </p:sp>
-      <p:sp>
-        <p:nvSpPr>
           <p:cNvPr id="8" name="TextBox 7"/>
           <p:cNvSpPr txBox="1"/>
           <p:nvPr/>
         </p:nvSpPr>
         <p:spPr>
           <a:xfrm>
-            <a:off x="6934200" y="1173361"/>
+            <a:off x="6057900" y="221962"/>
             <a:ext cx="4343400" cy="584775"/>
           </a:xfrm>
           <a:prstGeom prst="rect">
@@ -6840,18 +6867,30 @@
           <a:lstStyle/>
           <a:p>
             <a:r>
-              <a:rPr lang="bg-BG" sz="3200" b="1" dirty="0"/>
+              <a:rPr lang="bg-BG" sz="3200" b="1" dirty="0">
+                <a:latin typeface="Times New Roman" panose="02020603050405020304" pitchFamily="18" charset="0"/>
+                <a:cs typeface="Times New Roman" panose="02020603050405020304" pitchFamily="18" charset="0"/>
+              </a:rPr>
               <a:t>Библиотеки на </a:t>
             </a:r>
             <a:r>
-              <a:rPr lang="en-US" sz="3200" b="1" dirty="0"/>
+              <a:rPr lang="en-US" sz="3200" b="1" dirty="0">
+                <a:latin typeface="Times New Roman" panose="02020603050405020304" pitchFamily="18" charset="0"/>
+                <a:cs typeface="Times New Roman" panose="02020603050405020304" pitchFamily="18" charset="0"/>
+              </a:rPr>
               <a:t>Python</a:t>
             </a:r>
             <a:r>
-              <a:rPr lang="en-US" dirty="0"/>
+              <a:rPr lang="en-US" dirty="0">
+                <a:latin typeface="Times New Roman" panose="02020603050405020304" pitchFamily="18" charset="0"/>
+                <a:cs typeface="Times New Roman" panose="02020603050405020304" pitchFamily="18" charset="0"/>
+              </a:rPr>
               <a:t>.</a:t>
             </a:r>
-            <a:endParaRPr lang="bg-BG" dirty="0"/>
+            <a:endParaRPr lang="bg-BG" dirty="0">
+              <a:latin typeface="Times New Roman" panose="02020603050405020304" pitchFamily="18" charset="0"/>
+              <a:cs typeface="Times New Roman" panose="02020603050405020304" pitchFamily="18" charset="0"/>
+            </a:endParaRPr>
           </a:p>
         </p:txBody>
       </p:sp>
@@ -6865,6 +6904,182 @@
         </p:nvPicPr>
         <p:blipFill>
           <a:blip r:embed="rId3" cstate="print">
+            <a:extLst>
+              <a:ext uri="{BEBA8EAE-BF5A-486C-A8C5-ECC9F3942E4B}">
+                <a14:imgProps xmlns:a14="http://schemas.microsoft.com/office/drawing/2010/main">
+                  <a14:imgLayer r:embed="rId4">
+                    <a14:imgEffect>
+                      <a14:backgroundRemoval t="2422" b="92266" l="5391" r="94766"/>
+                    </a14:imgEffect>
+                  </a14:imgLayer>
+                </a14:imgProps>
+              </a:ext>
+              <a:ext uri="{28A0092B-C50C-407E-A947-70E740481C1C}">
+                <a14:useLocalDpi xmlns:a14="http://schemas.microsoft.com/office/drawing/2010/main" val="0"/>
+              </a:ext>
+            </a:extLst>
+          </a:blip>
+          <a:srcRect/>
+          <a:stretch>
+            <a:fillRect/>
+          </a:stretch>
+        </p:blipFill>
+        <p:spPr bwMode="auto">
+          <a:xfrm>
+            <a:off x="7217339" y="1153404"/>
+            <a:ext cx="2904671" cy="2904671"/>
+          </a:xfrm>
+          <a:prstGeom prst="rect">
+            <a:avLst/>
+          </a:prstGeom>
+          <a:ln>
+            <a:noFill/>
+          </a:ln>
+          <a:effectLst>
+            <a:outerShdw blurRad="292100" dist="139700" dir="2700000" algn="tl" rotWithShape="0">
+              <a:srgbClr val="333333">
+                <a:alpha val="65000"/>
+              </a:srgbClr>
+            </a:outerShdw>
+          </a:effectLst>
+          <a:extLst>
+            <a:ext uri="{909E8E84-426E-40DD-AFC4-6F175D3DCCD1}">
+              <a14:hiddenFill xmlns:a14="http://schemas.microsoft.com/office/drawing/2010/main">
+                <a:solidFill>
+                  <a:srgbClr val="FFFFFF"/>
+                </a:solidFill>
+              </a14:hiddenFill>
+            </a:ext>
+          </a:extLst>
+        </p:spPr>
+      </p:pic>
+      <p:pic>
+        <p:nvPicPr>
+          <p:cNvPr id="1026" name="Picture 2" descr="Django - Full Stack Python"/>
+          <p:cNvPicPr>
+            <a:picLocks noChangeAspect="1" noChangeArrowheads="1"/>
+          </p:cNvPicPr>
+          <p:nvPr/>
+        </p:nvPicPr>
+        <p:blipFill>
+          <a:blip r:embed="rId5" cstate="print">
+            <a:extLst>
+              <a:ext uri="{BEBA8EAE-BF5A-486C-A8C5-ECC9F3942E4B}">
+                <a14:imgProps xmlns:a14="http://schemas.microsoft.com/office/drawing/2010/main">
+                  <a14:imgLayer r:embed="rId6">
+                    <a14:imgEffect>
+                      <a14:backgroundRemoval t="0" b="100000" l="0" r="100000">
+                        <a14:foregroundMark x1="46333" y1="31579" x2="48000" y2="57895"/>
+                        <a14:foregroundMark x1="87917" y1="31579" x2="83250" y2="56938"/>
+                        <a14:foregroundMark x1="37500" y1="34450" x2="40917" y2="54067"/>
+                        <a14:foregroundMark x1="23583" y1="38278" x2="22583" y2="62679"/>
+                        <a14:foregroundMark x1="21917" y1="13158" x2="21917" y2="13158"/>
+                        <a14:foregroundMark x1="14833" y1="32536" x2="14167" y2="38278"/>
+                      </a14:backgroundRemoval>
+                    </a14:imgEffect>
+                  </a14:imgLayer>
+                </a14:imgProps>
+              </a:ext>
+              <a:ext uri="{28A0092B-C50C-407E-A947-70E740481C1C}">
+                <a14:useLocalDpi xmlns:a14="http://schemas.microsoft.com/office/drawing/2010/main" val="0"/>
+              </a:ext>
+            </a:extLst>
+          </a:blip>
+          <a:srcRect/>
+          <a:stretch>
+            <a:fillRect/>
+          </a:stretch>
+        </p:blipFill>
+        <p:spPr bwMode="auto">
+          <a:xfrm>
+            <a:off x="918029" y="5387582"/>
+            <a:ext cx="4286228" cy="1493036"/>
+          </a:xfrm>
+          <a:prstGeom prst="rect">
+            <a:avLst/>
+          </a:prstGeom>
+          <a:ln>
+            <a:noFill/>
+          </a:ln>
+          <a:effectLst>
+            <a:outerShdw blurRad="292100" dist="139700" dir="2700000" algn="tl" rotWithShape="0">
+              <a:srgbClr val="333333">
+                <a:alpha val="65000"/>
+              </a:srgbClr>
+            </a:outerShdw>
+          </a:effectLst>
+          <a:extLst>
+            <a:ext uri="{909E8E84-426E-40DD-AFC4-6F175D3DCCD1}">
+              <a14:hiddenFill xmlns:a14="http://schemas.microsoft.com/office/drawing/2010/main">
+                <a:solidFill>
+                  <a:srgbClr val="FFFFFF"/>
+                </a:solidFill>
+              </a14:hiddenFill>
+            </a:ext>
+          </a:extLst>
+        </p:spPr>
+      </p:pic>
+      <p:pic>
+        <p:nvPicPr>
+          <p:cNvPr id="9" name="Picture 8"/>
+          <p:cNvPicPr>
+            <a:picLocks noChangeAspect="1"/>
+          </p:cNvPicPr>
+          <p:nvPr/>
+        </p:nvPicPr>
+        <p:blipFill>
+          <a:blip r:embed="rId7">
+            <a:extLst>
+              <a:ext uri="{BEBA8EAE-BF5A-486C-A8C5-ECC9F3942E4B}">
+                <a14:imgProps xmlns:a14="http://schemas.microsoft.com/office/drawing/2010/main">
+                  <a14:imgLayer r:embed="rId8">
+                    <a14:imgEffect>
+                      <a14:backgroundRemoval t="175" b="99302" l="4197" r="96898">
+                        <a14:foregroundMark x1="5657" y1="24782" x2="47080" y2="2094"/>
+                      </a14:backgroundRemoval>
+                    </a14:imgEffect>
+                  </a14:imgLayer>
+                </a14:imgProps>
+              </a:ext>
+              <a:ext uri="{28A0092B-C50C-407E-A947-70E740481C1C}">
+                <a14:useLocalDpi xmlns:a14="http://schemas.microsoft.com/office/drawing/2010/main" val="0"/>
+              </a:ext>
+            </a:extLst>
+          </a:blip>
+          <a:stretch>
+            <a:fillRect/>
+          </a:stretch>
+        </p:blipFill>
+        <p:spPr>
+          <a:xfrm>
+            <a:off x="7542317" y="6134100"/>
+            <a:ext cx="2460394" cy="2572638"/>
+          </a:xfrm>
+          <a:prstGeom prst="rect">
+            <a:avLst/>
+          </a:prstGeom>
+          <a:ln>
+            <a:noFill/>
+          </a:ln>
+          <a:effectLst>
+            <a:outerShdw blurRad="292100" dist="139700" dir="2700000" algn="tl" rotWithShape="0">
+              <a:srgbClr val="333333">
+                <a:alpha val="65000"/>
+              </a:srgbClr>
+            </a:outerShdw>
+          </a:effectLst>
+        </p:spPr>
+      </p:pic>
+      <p:pic>
+        <p:nvPicPr>
+          <p:cNvPr id="1034" name="Picture 10" descr="Keras: Deep Learning for humans"/>
+          <p:cNvPicPr>
+            <a:picLocks noChangeAspect="1" noChangeArrowheads="1"/>
+          </p:cNvPicPr>
+          <p:nvPr/>
+        </p:nvPicPr>
+        <p:blipFill>
+          <a:blip r:embed="rId9">
             <a:extLst>
               <a:ext uri="{28A0092B-C50C-407E-A947-70E740481C1C}">
                 <a14:useLocalDpi xmlns:a14="http://schemas.microsoft.com/office/drawing/2010/main" val="0"/>
@@ -6878,13 +7093,22 @@
         </p:blipFill>
         <p:spPr bwMode="auto">
           <a:xfrm>
-            <a:off x="457200" y="1638300"/>
-            <a:ext cx="4274939" cy="4274939"/>
+            <a:off x="12340771" y="5264576"/>
+            <a:ext cx="5572557" cy="1616042"/>
           </a:xfrm>
           <a:prstGeom prst="rect">
             <a:avLst/>
           </a:prstGeom>
-          <a:noFill/>
+          <a:ln>
+            <a:noFill/>
+          </a:ln>
+          <a:effectLst>
+            <a:outerShdw blurRad="292100" dist="139700" dir="2700000" algn="tl" rotWithShape="0">
+              <a:srgbClr val="333333">
+                <a:alpha val="65000"/>
+              </a:srgbClr>
+            </a:outerShdw>
+          </a:effectLst>
           <a:extLst>
             <a:ext uri="{909E8E84-426E-40DD-AFC4-6F175D3DCCD1}">
               <a14:hiddenFill xmlns:a14="http://schemas.microsoft.com/office/drawing/2010/main">
@@ -7095,7 +7319,7 @@
         </p:nvSpPr>
         <p:spPr>
           <a:xfrm>
-            <a:off x="3200400" y="1028700"/>
+            <a:off x="2590800" y="221962"/>
             <a:ext cx="12496800" cy="584775"/>
           </a:xfrm>
           <a:prstGeom prst="rect">
@@ -7111,41 +7335,36 @@
           <a:p>
             <a:r>
               <a:rPr lang="en-US" sz="3200" b="1" dirty="0">
-                <a:latin typeface="Open Sans" panose="020B0604020202020204" charset="0"/>
+                <a:latin typeface="Times New Roman" panose="02020603050405020304" pitchFamily="18" charset="0"/>
                 <a:ea typeface="Open Sans" panose="020B0604020202020204" charset="0"/>
-                <a:cs typeface="Open Sans" panose="020B0604020202020204" charset="0"/>
+                <a:cs typeface="Times New Roman" panose="02020603050405020304" pitchFamily="18" charset="0"/>
               </a:rPr>
               <a:t>Django Framework </a:t>
             </a:r>
             <a:r>
               <a:rPr lang="bg-BG" sz="3200" b="1" dirty="0">
-                <a:latin typeface="Open Sans" panose="020B0604020202020204" charset="0"/>
+                <a:latin typeface="Times New Roman" panose="02020603050405020304" pitchFamily="18" charset="0"/>
                 <a:ea typeface="Open Sans" panose="020B0604020202020204" charset="0"/>
-                <a:cs typeface="Open Sans" panose="020B0604020202020204" charset="0"/>
+                <a:cs typeface="Times New Roman" panose="02020603050405020304" pitchFamily="18" charset="0"/>
               </a:rPr>
               <a:t>и </a:t>
             </a:r>
             <a:r>
               <a:rPr lang="en-US" sz="3200" b="1" dirty="0">
-                <a:latin typeface="Open Sans" panose="020B0604020202020204" charset="0"/>
+                <a:latin typeface="Times New Roman" panose="02020603050405020304" pitchFamily="18" charset="0"/>
                 <a:ea typeface="Open Sans" panose="020B0604020202020204" charset="0"/>
-                <a:cs typeface="Open Sans" panose="020B0604020202020204" charset="0"/>
+                <a:cs typeface="Times New Roman" panose="02020603050405020304" pitchFamily="18" charset="0"/>
               </a:rPr>
               <a:t>REST API. </a:t>
             </a:r>
             <a:r>
               <a:rPr lang="bg-BG" sz="3200" b="1" dirty="0">
-                <a:latin typeface="Open Sans" panose="020B0604020202020204" charset="0"/>
+                <a:latin typeface="Times New Roman" panose="02020603050405020304" pitchFamily="18" charset="0"/>
                 <a:ea typeface="Open Sans" panose="020B0604020202020204" charset="0"/>
-                <a:cs typeface="Open Sans" panose="020B0604020202020204" charset="0"/>
+                <a:cs typeface="Times New Roman" panose="02020603050405020304" pitchFamily="18" charset="0"/>
               </a:rPr>
               <a:t>Клиент-сървър архитектура.</a:t>
             </a:r>
-            <a:endParaRPr lang="bg-BG" sz="3200" b="1" dirty="0">
-              <a:latin typeface="Open Sans" panose="020B0604020202020204" charset="0"/>
-              <a:ea typeface="Open Sans" panose="020B0604020202020204" charset="0"/>
-              <a:cs typeface="Open Sans" panose="020B0604020202020204" charset="0"/>
-            </a:endParaRPr>
           </a:p>
         </p:txBody>
       </p:sp>
@@ -7348,7 +7567,7 @@
         </p:nvSpPr>
         <p:spPr>
           <a:xfrm>
-            <a:off x="3352800" y="1173361"/>
+            <a:off x="1981200" y="221962"/>
             <a:ext cx="14325600" cy="584775"/>
           </a:xfrm>
           <a:prstGeom prst="rect">
@@ -7364,17 +7583,23 @@
           <a:p>
             <a:r>
               <a:rPr lang="ru-RU" sz="3200" b="1" dirty="0">
-                <a:latin typeface="Open Sans" panose="020B0604020202020204" charset="0"/>
+                <a:latin typeface="Times New Roman" panose="02020603050405020304" pitchFamily="18" charset="0"/>
                 <a:ea typeface="Open Sans" panose="020B0604020202020204" charset="0"/>
-                <a:cs typeface="Open Sans" panose="020B0604020202020204" charset="0"/>
+                <a:cs typeface="Times New Roman" panose="02020603050405020304" pitchFamily="18" charset="0"/>
               </a:rPr>
               <a:t>Точност на класификацията и потребителско преживяване</a:t>
             </a:r>
             <a:r>
-              <a:rPr lang="ru-RU" b="1" dirty="0"/>
+              <a:rPr lang="ru-RU" b="1" dirty="0">
+                <a:latin typeface="Times New Roman" panose="02020603050405020304" pitchFamily="18" charset="0"/>
+                <a:cs typeface="Times New Roman" panose="02020603050405020304" pitchFamily="18" charset="0"/>
+              </a:rPr>
               <a:t>.</a:t>
             </a:r>
-            <a:endParaRPr lang="bg-BG" b="1" dirty="0"/>
+            <a:endParaRPr lang="bg-BG" b="1" dirty="0">
+              <a:latin typeface="Times New Roman" panose="02020603050405020304" pitchFamily="18" charset="0"/>
+              <a:cs typeface="Times New Roman" panose="02020603050405020304" pitchFamily="18" charset="0"/>
+            </a:endParaRPr>
           </a:p>
         </p:txBody>
       </p:sp>
@@ -7611,7 +7836,7 @@
             <a:blip r:embed="rId3">
               <a:extLst>
                 <a:ext uri="{96DAC541-7B7A-43D3-8B79-37D633B846F1}">
-                  <asvg:svgBlip xmlns="" xmlns:asvg="http://schemas.microsoft.com/office/drawing/2016/SVG/main" r:embed="rId4"/>
+                  <asvg:svgBlip xmlns:asvg="http://schemas.microsoft.com/office/drawing/2016/SVG/main" xmlns="" r:embed="rId4"/>
                 </a:ext>
               </a:extLst>
             </a:blip>
@@ -7663,7 +7888,7 @@
             <a:blip r:embed="rId3">
               <a:extLst>
                 <a:ext uri="{96DAC541-7B7A-43D3-8B79-37D633B846F1}">
-                  <asvg:svgBlip xmlns="" xmlns:asvg="http://schemas.microsoft.com/office/drawing/2016/SVG/main" r:embed="rId4"/>
+                  <asvg:svgBlip xmlns:asvg="http://schemas.microsoft.com/office/drawing/2016/SVG/main" xmlns="" r:embed="rId4"/>
                 </a:ext>
               </a:extLst>
             </a:blip>

--- a/DR/презентация.pptx
+++ b/DR/презентация.pptx
@@ -23,23 +23,23 @@
   <p:notesSz cx="6858000" cy="9144000"/>
   <p:embeddedFontLst>
     <p:embeddedFont>
-      <p:font typeface="Red Hat Display" panose="020B0604020202020204" charset="0"/>
+      <p:font typeface="Open Sans" panose="020B0604020202020204" charset="0"/>
       <p:regular r:id="rId13"/>
     </p:embeddedFont>
     <p:embeddedFont>
-      <p:font typeface="Open Sans" panose="020B0604020202020204" charset="0"/>
+      <p:font typeface="Red Hat Display" panose="020B0604020202020204" charset="0"/>
       <p:regular r:id="rId14"/>
     </p:embeddedFont>
     <p:embeddedFont>
-      <p:font typeface="Calibri" panose="020F0502020204030204" pitchFamily="34" charset="0"/>
+      <p:font typeface="Open Sans Bold" panose="020B0604020202020204" charset="0"/>
       <p:regular r:id="rId15"/>
-      <p:bold r:id="rId16"/>
-      <p:italic r:id="rId17"/>
-      <p:boldItalic r:id="rId18"/>
     </p:embeddedFont>
     <p:embeddedFont>
-      <p:font typeface="Open Sans Bold" panose="020B0604020202020204" charset="0"/>
-      <p:regular r:id="rId19"/>
+      <p:font typeface="Calibri" panose="020F0502020204030204" pitchFamily="34" charset="0"/>
+      <p:regular r:id="rId16"/>
+      <p:bold r:id="rId17"/>
+      <p:italic r:id="rId18"/>
+      <p:boldItalic r:id="rId19"/>
     </p:embeddedFont>
   </p:embeddedFontLst>
   <p:defaultTextStyle>
@@ -238,7 +238,7 @@
           <a:p>
             <a:fld id="{BE55020F-7003-4703-AC9D-8EFB0C563F7C}" type="datetimeFigureOut">
               <a:rPr lang="bg-BG" smtClean="0"/>
-              <a:t>27.4.2026 г.</a:t>
+              <a:t>28.4.2026 г.</a:t>
             </a:fld>
             <a:endParaRPr lang="bg-BG"/>
           </a:p>
@@ -552,11 +552,7 @@
           <a:p>
             <a:r>
               <a:rPr lang="ru-RU" dirty="0" smtClean="0"/>
-              <a:t>Уважаема г-жо Директор, Уважаема комисия, уважаеми гости (ако има такива/или поименно – ако е </a:t>
-            </a:r>
-            <a:r>
-              <a:rPr lang="ru-RU" dirty="0" smtClean="0"/>
-              <a:t>еди</a:t>
+              <a:t>Уважаема г-жо Директор, Уважаема комисия, уважаеми гости (ако има такива/или поименно – ако е еди</a:t>
             </a:r>
             <a:r>
               <a:rPr lang="bg-BG" dirty="0" smtClean="0"/>
@@ -564,11 +560,7 @@
             </a:r>
             <a:r>
               <a:rPr lang="ru-RU" dirty="0" smtClean="0"/>
-              <a:t> </a:t>
-            </a:r>
-            <a:r>
-              <a:rPr lang="ru-RU" dirty="0" smtClean="0"/>
-              <a:t>конкретен гост)</a:t>
+              <a:t> конкретен гост)</a:t>
             </a:r>
           </a:p>
           <a:p>
@@ -714,7 +706,91 @@
                 <a:ea typeface="+mn-ea"/>
                 <a:cs typeface="+mn-cs"/>
               </a:rPr>
-              <a:t>Целта на разработката е да създаде интелигентно и бързо решение за разпознаване на растения чрез снимки, използвайки съвременни технологии в областта на изкуствения интелект. Проектът обединява сложни алгоритми за машинно обучение с практична уеб архитектура, приложима в екологията и агрономията.</a:t>
+              <a:t>Целта на разработката е да създаде </a:t>
+            </a:r>
+            <a:r>
+              <a:rPr lang="ru-RU" sz="1200" b="0" i="0" kern="1200" dirty="0" smtClean="0">
+                <a:solidFill>
+                  <a:schemeClr val="tx1"/>
+                </a:solidFill>
+                <a:effectLst/>
+                <a:latin typeface="+mn-lt"/>
+                <a:ea typeface="+mn-ea"/>
+                <a:cs typeface="+mn-cs"/>
+              </a:rPr>
+              <a:t>точно </a:t>
+            </a:r>
+            <a:r>
+              <a:rPr lang="ru-RU" sz="1200" b="0" i="0" kern="1200" dirty="0" smtClean="0">
+                <a:solidFill>
+                  <a:schemeClr val="tx1"/>
+                </a:solidFill>
+                <a:effectLst/>
+                <a:latin typeface="+mn-lt"/>
+                <a:ea typeface="+mn-ea"/>
+                <a:cs typeface="+mn-cs"/>
+              </a:rPr>
+              <a:t>и бързо решение за разпознаване на растения чрез снимки, използвайки съвременни технологии в областта на изкуствения интелект. Проектът обединява сложни алгоритми за машинно обучение с практична уеб архитектура, приложима </a:t>
+            </a:r>
+            <a:r>
+              <a:rPr lang="ru-RU" sz="1200" b="0" i="0" kern="1200" dirty="0" smtClean="0">
+                <a:solidFill>
+                  <a:schemeClr val="tx1"/>
+                </a:solidFill>
+                <a:effectLst/>
+                <a:latin typeface="+mn-lt"/>
+                <a:ea typeface="+mn-ea"/>
+                <a:cs typeface="+mn-cs"/>
+              </a:rPr>
+              <a:t>в</a:t>
+            </a:r>
+            <a:r>
+              <a:rPr lang="en-US" sz="1200" b="0" i="0" kern="1200" dirty="0" smtClean="0">
+                <a:solidFill>
+                  <a:schemeClr val="tx1"/>
+                </a:solidFill>
+                <a:effectLst/>
+                <a:latin typeface="+mn-lt"/>
+                <a:ea typeface="+mn-ea"/>
+                <a:cs typeface="+mn-cs"/>
+              </a:rPr>
+              <a:t> </a:t>
+            </a:r>
+            <a:r>
+              <a:rPr lang="bg-BG" sz="1200" b="0" i="0" kern="1200" dirty="0" smtClean="0">
+                <a:solidFill>
+                  <a:schemeClr val="tx1"/>
+                </a:solidFill>
+                <a:effectLst/>
+                <a:latin typeface="+mn-lt"/>
+                <a:ea typeface="+mn-ea"/>
+                <a:cs typeface="+mn-cs"/>
+              </a:rPr>
+              <a:t>образованието,</a:t>
+            </a:r>
+            <a:r>
+              <a:rPr lang="ru-RU" sz="1200" b="0" i="0" kern="1200" dirty="0" smtClean="0">
+                <a:solidFill>
+                  <a:schemeClr val="tx1"/>
+                </a:solidFill>
+                <a:effectLst/>
+                <a:latin typeface="+mn-lt"/>
+                <a:ea typeface="+mn-ea"/>
+                <a:cs typeface="+mn-cs"/>
+              </a:rPr>
+              <a:t> </a:t>
+            </a:r>
+            <a:r>
+              <a:rPr lang="ru-RU" sz="1200" b="0" i="0" kern="1200" dirty="0" smtClean="0">
+                <a:solidFill>
+                  <a:schemeClr val="tx1"/>
+                </a:solidFill>
+                <a:effectLst/>
+                <a:latin typeface="+mn-lt"/>
+                <a:ea typeface="+mn-ea"/>
+                <a:cs typeface="+mn-cs"/>
+              </a:rPr>
+              <a:t>екологията и агрономията.</a:t>
             </a:r>
             <a:endParaRPr lang="bg-BG" dirty="0" smtClean="0"/>
           </a:p>
@@ -1155,96 +1231,62 @@
           <a:bodyPr/>
           <a:lstStyle/>
           <a:p>
-            <a:pPr marL="0" marR="0" indent="0" algn="l" defTabSz="914400" rtl="0" eaLnBrk="1" fontAlgn="auto" latinLnBrk="0" hangingPunct="1">
-              <a:lnSpc>
-                <a:spcPct val="100000"/>
-              </a:lnSpc>
-              <a:spcBef>
-                <a:spcPts val="0"/>
-              </a:spcBef>
-              <a:spcAft>
-                <a:spcPts val="0"/>
-              </a:spcAft>
-              <a:buClrTx/>
-              <a:buSzTx/>
-              <a:buFontTx/>
-              <a:buNone/>
-              <a:tabLst/>
-              <a:defRPr/>
-            </a:pPr>
-            <a:r>
-              <a:rPr lang="ru-RU" sz="1200" b="0" i="0" kern="1200" dirty="0" smtClean="0">
-                <a:solidFill>
-                  <a:schemeClr val="tx1"/>
-                </a:solidFill>
-                <a:effectLst/>
-                <a:latin typeface="+mn-lt"/>
-                <a:ea typeface="+mn-ea"/>
-                <a:cs typeface="+mn-cs"/>
-              </a:rPr>
-              <a:t>Процес на обучение и подготовка на данните</a:t>
-            </a:r>
-          </a:p>
-          <a:p>
-            <a:pPr marL="0" marR="0" indent="0" algn="l" defTabSz="914400" rtl="0" eaLnBrk="1" fontAlgn="auto" latinLnBrk="0" hangingPunct="1">
-              <a:lnSpc>
-                <a:spcPct val="100000"/>
-              </a:lnSpc>
-              <a:spcBef>
-                <a:spcPts val="0"/>
-              </a:spcBef>
-              <a:spcAft>
-                <a:spcPts val="0"/>
-              </a:spcAft>
-              <a:buClrTx/>
-              <a:buSzTx/>
-              <a:buFontTx/>
-              <a:buNone/>
-              <a:tabLst/>
-              <a:defRPr/>
-            </a:pPr>
-            <a:endParaRPr lang="ru-RU" sz="1200" b="0" i="0" kern="1200" dirty="0" smtClean="0">
-              <a:solidFill>
-                <a:schemeClr val="tx1"/>
-              </a:solidFill>
-              <a:effectLst/>
-              <a:latin typeface="+mn-lt"/>
-              <a:ea typeface="+mn-ea"/>
-              <a:cs typeface="+mn-cs"/>
-            </a:endParaRPr>
-          </a:p>
-          <a:p>
-            <a:pPr marL="0" marR="0" indent="0" algn="l" defTabSz="914400" rtl="0" eaLnBrk="1" fontAlgn="auto" latinLnBrk="0" hangingPunct="1">
-              <a:lnSpc>
-                <a:spcPct val="100000"/>
-              </a:lnSpc>
-              <a:spcBef>
-                <a:spcPts val="0"/>
-              </a:spcBef>
-              <a:spcAft>
-                <a:spcPts val="0"/>
-              </a:spcAft>
-              <a:buClrTx/>
-              <a:buSzTx/>
-              <a:buFontTx/>
-              <a:buNone/>
-              <a:tabLst/>
-              <a:defRPr/>
-            </a:pPr>
-            <a:r>
-              <a:rPr lang="ru-RU" sz="1200" b="0" i="0" kern="1200" dirty="0" smtClean="0">
-                <a:solidFill>
-                  <a:schemeClr val="tx1"/>
-                </a:solidFill>
-                <a:effectLst/>
-                <a:latin typeface="+mn-lt"/>
-                <a:ea typeface="+mn-ea"/>
-                <a:cs typeface="+mn-cs"/>
-              </a:rPr>
-              <a:t>Реализацията на модела премина през няколко етапа, използвайки екосистемата на Python. Извърших детайлна подготовка на данните, включително преоразмеряване и нормализация на изображенията, за да осигуря стабилност на обучението. Процесът включваше и фино настройване на последните слоеве на невронната мрежа, така че тя да се адаптира максимално добре към визуалните характеристики на конкретните растителни видове.</a:t>
-            </a:r>
-          </a:p>
-          <a:p>
+            <a:r>
+              <a:rPr lang="bg-BG" dirty="0" smtClean="0"/>
+              <a:t>Проекта</a:t>
+            </a:r>
+            <a:r>
+              <a:rPr lang="bg-BG" baseline="0" dirty="0" smtClean="0"/>
+              <a:t> е базиран на езика </a:t>
+            </a:r>
+            <a:r>
+              <a:rPr lang="en-US" baseline="0" dirty="0" smtClean="0"/>
+              <a:t>Python</a:t>
+            </a:r>
+            <a:r>
+              <a:rPr lang="bg-BG" baseline="0" dirty="0" smtClean="0"/>
+              <a:t>. Основната използвана библиотека е </a:t>
+            </a:r>
+            <a:r>
+              <a:rPr lang="en-US" baseline="0" dirty="0" err="1" smtClean="0"/>
+              <a:t>TensorFlow</a:t>
+            </a:r>
+            <a:r>
+              <a:rPr lang="bg-BG" baseline="0" dirty="0" smtClean="0"/>
+              <a:t>, която изчислява сложните математически изчисления</a:t>
+            </a:r>
+            <a:r>
+              <a:rPr lang="en-US" baseline="0" dirty="0" smtClean="0"/>
+              <a:t> </a:t>
+            </a:r>
+            <a:r>
+              <a:rPr lang="bg-BG" baseline="0" dirty="0" smtClean="0"/>
+              <a:t>на зададен план. Друга използвана библиотека е </a:t>
+            </a:r>
+            <a:r>
+              <a:rPr lang="en-US" baseline="0" dirty="0" err="1" smtClean="0"/>
+              <a:t>Keras</a:t>
+            </a:r>
+            <a:r>
+              <a:rPr lang="en-US" baseline="0" dirty="0" smtClean="0"/>
+              <a:t> </a:t>
+            </a:r>
+            <a:r>
+              <a:rPr lang="bg-BG" baseline="0" dirty="0" smtClean="0"/>
+              <a:t>- </a:t>
+            </a:r>
+            <a:r>
+              <a:rPr lang="ru-RU" baseline="0" dirty="0" smtClean="0"/>
+              <a:t>т</a:t>
+            </a:r>
+            <a:r>
+              <a:rPr lang="ru-RU" dirty="0" smtClean="0"/>
+              <a:t>я служи като интерфейс от високо ниво (API), който позволява на разработчиците бързо и лесно да изграждат, обучават и тестват невронни мрежи.</a:t>
+            </a:r>
+            <a:r>
+              <a:rPr lang="bg-BG" baseline="0" dirty="0" smtClean="0"/>
+              <a:t> </a:t>
+            </a:r>
             <a:endParaRPr lang="bg-BG" dirty="0" smtClean="0"/>
           </a:p>
           <a:p>
@@ -1583,6 +1625,30 @@
           <a:lstStyle/>
           <a:p>
             <a:r>
+              <a:rPr lang="bg-BG" sz="1200" b="0" i="0" kern="1200" dirty="0" smtClean="0">
+                <a:solidFill>
+                  <a:schemeClr val="tx1"/>
+                </a:solidFill>
+                <a:effectLst/>
+                <a:latin typeface="+mn-lt"/>
+                <a:ea typeface="+mn-ea"/>
+                <a:cs typeface="+mn-cs"/>
+              </a:rPr>
+              <a:t>Това</a:t>
+            </a:r>
+            <a:r>
+              <a:rPr lang="bg-BG" sz="1200" b="0" i="0" kern="1200" baseline="0" dirty="0" smtClean="0">
+                <a:solidFill>
+                  <a:schemeClr val="tx1"/>
+                </a:solidFill>
+                <a:effectLst/>
+                <a:latin typeface="+mn-lt"/>
+                <a:ea typeface="+mn-ea"/>
+                <a:cs typeface="+mn-cs"/>
+              </a:rPr>
+              <a:t> е накратко моят</a:t>
+            </a:r>
+            <a:r>
               <a:rPr lang="ru-RU" sz="1200" b="0" i="0" kern="1200" dirty="0" smtClean="0">
                 <a:solidFill>
                   <a:schemeClr val="tx1"/>
@@ -1592,7 +1658,19 @@
                 <a:ea typeface="+mn-ea"/>
                 <a:cs typeface="+mn-cs"/>
               </a:rPr>
-              <a:t>В заключение, проектът демонстрира силата на съвременните AI технологии. Като следваща стъпка планирам разширяване на базата данни с повече видове и добавяне на функционалност за разпознаване на болести по растенията. Това би превърнало приложението в още по-ценен помощник в земеделието. Благодаря за вниманието и съм </a:t>
+              <a:t> проект,</a:t>
+            </a:r>
+            <a:r>
+              <a:rPr lang="ru-RU" sz="1200" b="0" i="0" kern="1200" baseline="0" dirty="0" smtClean="0">
+                <a:solidFill>
+                  <a:schemeClr val="tx1"/>
+                </a:solidFill>
+                <a:effectLst/>
+                <a:latin typeface="+mn-lt"/>
+                <a:ea typeface="+mn-ea"/>
+                <a:cs typeface="+mn-cs"/>
+              </a:rPr>
+              <a:t> който</a:t>
             </a:r>
             <a:r>
               <a:rPr lang="ru-RU" sz="1200" b="0" i="0" kern="1200" dirty="0" smtClean="0">
@@ -1604,43 +1682,7 @@
                 <a:ea typeface="+mn-ea"/>
                 <a:cs typeface="+mn-cs"/>
               </a:rPr>
-              <a:t>готов</a:t>
-            </a:r>
-            <a:r>
-              <a:rPr lang="bg-BG" sz="1200" b="0" i="0" kern="1200" dirty="0" smtClean="0">
-                <a:solidFill>
-                  <a:schemeClr val="tx1"/>
-                </a:solidFill>
-                <a:effectLst/>
-                <a:latin typeface="+mn-lt"/>
-                <a:ea typeface="+mn-ea"/>
-                <a:cs typeface="+mn-cs"/>
-              </a:rPr>
-              <a:t>а</a:t>
-            </a:r>
-            <a:r>
-              <a:rPr lang="ru-RU" sz="1200" b="0" i="0" kern="1200" dirty="0" smtClean="0">
-                <a:solidFill>
-                  <a:schemeClr val="tx1"/>
-                </a:solidFill>
-                <a:effectLst/>
-                <a:latin typeface="+mn-lt"/>
-                <a:ea typeface="+mn-ea"/>
-                <a:cs typeface="+mn-cs"/>
-              </a:rPr>
-              <a:t> </a:t>
-            </a:r>
-            <a:r>
-              <a:rPr lang="ru-RU" sz="1200" b="0" i="0" kern="1200" dirty="0" smtClean="0">
-                <a:solidFill>
-                  <a:schemeClr val="tx1"/>
-                </a:solidFill>
-                <a:effectLst/>
-                <a:latin typeface="+mn-lt"/>
-                <a:ea typeface="+mn-ea"/>
-                <a:cs typeface="+mn-cs"/>
-              </a:rPr>
-              <a:t>да отговоря на вашите въпроси!</a:t>
+              <a:t> доказа, че съвременните AI технологии могат успешно да се интегрират в достъпни уеб инструменти. </a:t>
             </a:r>
             <a:endParaRPr lang="bg-BG" dirty="0"/>
           </a:p>
@@ -1864,7 +1906,7 @@
             <a:fld id="{1D8BD707-D9CF-40AE-B4C6-C98DA3205C09}" type="datetimeFigureOut">
               <a:rPr lang="en-US" smtClean="0"/>
               <a:pPr/>
-              <a:t>4/27/2026</a:t>
+              <a:t>4/28/2026</a:t>
             </a:fld>
             <a:endParaRPr lang="en-US"/>
           </a:p>
@@ -2031,7 +2073,7 @@
             <a:fld id="{1D8BD707-D9CF-40AE-B4C6-C98DA3205C09}" type="datetimeFigureOut">
               <a:rPr lang="en-US" smtClean="0"/>
               <a:pPr/>
-              <a:t>4/27/2026</a:t>
+              <a:t>4/28/2026</a:t>
             </a:fld>
             <a:endParaRPr lang="en-US"/>
           </a:p>
@@ -2208,7 +2250,7 @@
             <a:fld id="{1D8BD707-D9CF-40AE-B4C6-C98DA3205C09}" type="datetimeFigureOut">
               <a:rPr lang="en-US" smtClean="0"/>
               <a:pPr/>
-              <a:t>4/27/2026</a:t>
+              <a:t>4/28/2026</a:t>
             </a:fld>
             <a:endParaRPr lang="en-US"/>
           </a:p>
@@ -2375,7 +2417,7 @@
             <a:fld id="{1D8BD707-D9CF-40AE-B4C6-C98DA3205C09}" type="datetimeFigureOut">
               <a:rPr lang="en-US" smtClean="0"/>
               <a:pPr/>
-              <a:t>4/27/2026</a:t>
+              <a:t>4/28/2026</a:t>
             </a:fld>
             <a:endParaRPr lang="en-US"/>
           </a:p>
@@ -2618,7 +2660,7 @@
             <a:fld id="{1D8BD707-D9CF-40AE-B4C6-C98DA3205C09}" type="datetimeFigureOut">
               <a:rPr lang="en-US" smtClean="0"/>
               <a:pPr/>
-              <a:t>4/27/2026</a:t>
+              <a:t>4/28/2026</a:t>
             </a:fld>
             <a:endParaRPr lang="en-US"/>
           </a:p>
@@ -2903,7 +2945,7 @@
             <a:fld id="{1D8BD707-D9CF-40AE-B4C6-C98DA3205C09}" type="datetimeFigureOut">
               <a:rPr lang="en-US" smtClean="0"/>
               <a:pPr/>
-              <a:t>4/27/2026</a:t>
+              <a:t>4/28/2026</a:t>
             </a:fld>
             <a:endParaRPr lang="en-US"/>
           </a:p>
@@ -3322,7 +3364,7 @@
             <a:fld id="{1D8BD707-D9CF-40AE-B4C6-C98DA3205C09}" type="datetimeFigureOut">
               <a:rPr lang="en-US" smtClean="0"/>
               <a:pPr/>
-              <a:t>4/27/2026</a:t>
+              <a:t>4/28/2026</a:t>
             </a:fld>
             <a:endParaRPr lang="en-US"/>
           </a:p>
@@ -3437,7 +3479,7 @@
             <a:fld id="{1D8BD707-D9CF-40AE-B4C6-C98DA3205C09}" type="datetimeFigureOut">
               <a:rPr lang="en-US" smtClean="0"/>
               <a:pPr/>
-              <a:t>4/27/2026</a:t>
+              <a:t>4/28/2026</a:t>
             </a:fld>
             <a:endParaRPr lang="en-US"/>
           </a:p>
@@ -3529,7 +3571,7 @@
             <a:fld id="{1D8BD707-D9CF-40AE-B4C6-C98DA3205C09}" type="datetimeFigureOut">
               <a:rPr lang="en-US" smtClean="0"/>
               <a:pPr/>
-              <a:t>4/27/2026</a:t>
+              <a:t>4/28/2026</a:t>
             </a:fld>
             <a:endParaRPr lang="en-US"/>
           </a:p>
@@ -3803,7 +3845,7 @@
             <a:fld id="{1D8BD707-D9CF-40AE-B4C6-C98DA3205C09}" type="datetimeFigureOut">
               <a:rPr lang="en-US" smtClean="0"/>
               <a:pPr/>
-              <a:t>4/27/2026</a:t>
+              <a:t>4/28/2026</a:t>
             </a:fld>
             <a:endParaRPr lang="en-US"/>
           </a:p>
@@ -4053,7 +4095,7 @@
             <a:fld id="{1D8BD707-D9CF-40AE-B4C6-C98DA3205C09}" type="datetimeFigureOut">
               <a:rPr lang="en-US" smtClean="0"/>
               <a:pPr/>
-              <a:t>4/27/2026</a:t>
+              <a:t>4/28/2026</a:t>
             </a:fld>
             <a:endParaRPr lang="en-US"/>
           </a:p>
@@ -4263,7 +4305,7 @@
             <a:fld id="{1D8BD707-D9CF-40AE-B4C6-C98DA3205C09}" type="datetimeFigureOut">
               <a:rPr lang="en-US" smtClean="0"/>
               <a:pPr/>
-              <a:t>4/27/2026</a:t>
+              <a:t>4/28/2026</a:t>
             </a:fld>
             <a:endParaRPr lang="en-US"/>
           </a:p>
@@ -4676,7 +4718,7 @@
             <a:blip r:embed="rId3">
               <a:extLst>
                 <a:ext uri="{96DAC541-7B7A-43D3-8B79-37D633B846F1}">
-                  <asvg:svgBlip xmlns:asvg="http://schemas.microsoft.com/office/drawing/2016/SVG/main" xmlns="" r:embed="rId4"/>
+                  <asvg:svgBlip xmlns="" xmlns:asvg="http://schemas.microsoft.com/office/drawing/2016/SVG/main" r:embed="rId4"/>
                 </a:ext>
               </a:extLst>
             </a:blip>
@@ -4728,7 +4770,7 @@
             <a:blip r:embed="rId3">
               <a:extLst>
                 <a:ext uri="{96DAC541-7B7A-43D3-8B79-37D633B846F1}">
-                  <asvg:svgBlip xmlns:asvg="http://schemas.microsoft.com/office/drawing/2016/SVG/main" xmlns="" r:embed="rId4"/>
+                  <asvg:svgBlip xmlns="" xmlns:asvg="http://schemas.microsoft.com/office/drawing/2016/SVG/main" r:embed="rId4"/>
                 </a:ext>
               </a:extLst>
             </a:blip>
@@ -4893,7 +4935,7 @@
             <a:blip r:embed="rId5">
               <a:extLst>
                 <a:ext uri="{96DAC541-7B7A-43D3-8B79-37D633B846F1}">
-                  <asvg:svgBlip xmlns:asvg="http://schemas.microsoft.com/office/drawing/2016/SVG/main" xmlns="" r:embed="rId6"/>
+                  <asvg:svgBlip xmlns="" xmlns:asvg="http://schemas.microsoft.com/office/drawing/2016/SVG/main" r:embed="rId6"/>
                 </a:ext>
               </a:extLst>
             </a:blip>
@@ -5067,7 +5109,7 @@
             <a:blip r:embed="rId5">
               <a:extLst>
                 <a:ext uri="{96DAC541-7B7A-43D3-8B79-37D633B846F1}">
-                  <asvg:svgBlip xmlns:asvg="http://schemas.microsoft.com/office/drawing/2016/SVG/main" xmlns="" r:embed="rId6"/>
+                  <asvg:svgBlip xmlns="" xmlns:asvg="http://schemas.microsoft.com/office/drawing/2016/SVG/main" r:embed="rId6"/>
                 </a:ext>
               </a:extLst>
             </a:blip>
@@ -5356,7 +5398,7 @@
             <a:blip r:embed="rId2">
               <a:extLst>
                 <a:ext uri="{96DAC541-7B7A-43D3-8B79-37D633B846F1}">
-                  <asvg:svgBlip xmlns:asvg="http://schemas.microsoft.com/office/drawing/2016/SVG/main" xmlns="" r:embed="rId3"/>
+                  <asvg:svgBlip xmlns="" xmlns:asvg="http://schemas.microsoft.com/office/drawing/2016/SVG/main" r:embed="rId3"/>
                 </a:ext>
               </a:extLst>
             </a:blip>
@@ -5408,7 +5450,7 @@
             <a:blip r:embed="rId2">
               <a:extLst>
                 <a:ext uri="{96DAC541-7B7A-43D3-8B79-37D633B846F1}">
-                  <asvg:svgBlip xmlns:asvg="http://schemas.microsoft.com/office/drawing/2016/SVG/main" xmlns="" r:embed="rId3"/>
+                  <asvg:svgBlip xmlns="" xmlns:asvg="http://schemas.microsoft.com/office/drawing/2016/SVG/main" r:embed="rId3"/>
                 </a:ext>
               </a:extLst>
             </a:blip>
@@ -5573,7 +5615,7 @@
             <a:blip r:embed="rId4">
               <a:extLst>
                 <a:ext uri="{96DAC541-7B7A-43D3-8B79-37D633B846F1}">
-                  <asvg:svgBlip xmlns:asvg="http://schemas.microsoft.com/office/drawing/2016/SVG/main" xmlns="" r:embed="rId5"/>
+                  <asvg:svgBlip xmlns="" xmlns:asvg="http://schemas.microsoft.com/office/drawing/2016/SVG/main" r:embed="rId5"/>
                 </a:ext>
               </a:extLst>
             </a:blip>
@@ -5625,7 +5667,7 @@
             <a:blip r:embed="rId4">
               <a:extLst>
                 <a:ext uri="{96DAC541-7B7A-43D3-8B79-37D633B846F1}">
-                  <asvg:svgBlip xmlns:asvg="http://schemas.microsoft.com/office/drawing/2016/SVG/main" xmlns="" r:embed="rId5"/>
+                  <asvg:svgBlip xmlns="" xmlns:asvg="http://schemas.microsoft.com/office/drawing/2016/SVG/main" r:embed="rId5"/>
                 </a:ext>
               </a:extLst>
             </a:blip>
@@ -5882,7 +5924,7 @@
         </p:nvSpPr>
         <p:spPr>
           <a:xfrm>
-            <a:off x="6030279" y="221962"/>
+            <a:off x="7391400" y="221962"/>
             <a:ext cx="3276600" cy="584775"/>
           </a:xfrm>
           <a:prstGeom prst="rect">
@@ -5897,13 +5939,13 @@
           <a:lstStyle/>
           <a:p>
             <a:r>
-              <a:rPr lang="bg-BG" sz="3200" dirty="0" smtClean="0">
+              <a:rPr lang="bg-BG" sz="3200" b="1" dirty="0" smtClean="0">
                 <a:latin typeface="Times New Roman" panose="02020603050405020304" pitchFamily="18" charset="0"/>
                 <a:cs typeface="Times New Roman" panose="02020603050405020304" pitchFamily="18" charset="0"/>
               </a:rPr>
               <a:t>Цел на проекта</a:t>
             </a:r>
-            <a:endParaRPr lang="bg-BG" sz="3200" dirty="0">
+            <a:endParaRPr lang="bg-BG" sz="3200" b="1" dirty="0">
               <a:latin typeface="Times New Roman" panose="02020603050405020304" pitchFamily="18" charset="0"/>
               <a:cs typeface="Times New Roman" panose="02020603050405020304" pitchFamily="18" charset="0"/>
             </a:endParaRPr>
@@ -6116,7 +6158,7 @@
         </p:nvSpPr>
         <p:spPr>
           <a:xfrm>
-            <a:off x="4419600" y="221961"/>
+            <a:off x="5334000" y="221961"/>
             <a:ext cx="15544800" cy="584775"/>
           </a:xfrm>
           <a:prstGeom prst="rect">
@@ -6345,7 +6387,7 @@
         </p:nvSpPr>
         <p:spPr>
           <a:xfrm>
-            <a:off x="4572000" y="221962"/>
+            <a:off x="5257800" y="221962"/>
             <a:ext cx="7761035" cy="584775"/>
           </a:xfrm>
           <a:prstGeom prst="rect">
@@ -6421,7 +6463,7 @@
         </p:blipFill>
         <p:spPr>
           <a:xfrm>
-            <a:off x="1523187" y="1237962"/>
+            <a:off x="2051717" y="1173361"/>
             <a:ext cx="13868400" cy="9036338"/>
           </a:xfrm>
           <a:prstGeom prst="rect">
@@ -6852,7 +6894,7 @@
         </p:nvSpPr>
         <p:spPr>
           <a:xfrm>
-            <a:off x="6057900" y="221962"/>
+            <a:off x="6629400" y="221962"/>
             <a:ext cx="4343400" cy="584775"/>
           </a:xfrm>
           <a:prstGeom prst="rect">
@@ -6926,8 +6968,8 @@
         </p:blipFill>
         <p:spPr bwMode="auto">
           <a:xfrm>
-            <a:off x="7217339" y="1153404"/>
-            <a:ext cx="2904671" cy="2904671"/>
+            <a:off x="6798239" y="1066799"/>
+            <a:ext cx="3603061" cy="3603061"/>
           </a:xfrm>
           <a:prstGeom prst="rect">
             <a:avLst/>
@@ -6992,8 +7034,8 @@
         </p:blipFill>
         <p:spPr bwMode="auto">
           <a:xfrm>
-            <a:off x="918029" y="5387582"/>
-            <a:ext cx="4286228" cy="1493036"/>
+            <a:off x="1371600" y="5275511"/>
+            <a:ext cx="3730171" cy="1299343"/>
           </a:xfrm>
           <a:prstGeom prst="rect">
             <a:avLst/>
@@ -7028,7 +7070,7 @@
           <p:nvPr/>
         </p:nvPicPr>
         <p:blipFill>
-          <a:blip r:embed="rId7">
+          <a:blip r:embed="rId7" cstate="print">
             <a:extLst>
               <a:ext uri="{BEBA8EAE-BF5A-486C-A8C5-ECC9F3942E4B}">
                 <a14:imgProps xmlns:a14="http://schemas.microsoft.com/office/drawing/2010/main">
@@ -7052,8 +7094,8 @@
         </p:blipFill>
         <p:spPr>
           <a:xfrm>
-            <a:off x="7542317" y="6134100"/>
-            <a:ext cx="2460394" cy="2572638"/>
+            <a:off x="7570327" y="6362700"/>
+            <a:ext cx="2058883" cy="2152810"/>
           </a:xfrm>
           <a:prstGeom prst="rect">
             <a:avLst/>
@@ -7079,7 +7121,7 @@
           <p:nvPr/>
         </p:nvPicPr>
         <p:blipFill>
-          <a:blip r:embed="rId9">
+          <a:blip r:embed="rId9" cstate="print">
             <a:extLst>
               <a:ext uri="{28A0092B-C50C-407E-A947-70E740481C1C}">
                 <a14:useLocalDpi xmlns:a14="http://schemas.microsoft.com/office/drawing/2010/main" val="0"/>
@@ -7094,7 +7136,7 @@
         <p:spPr bwMode="auto">
           <a:xfrm>
             <a:off x="12340771" y="5264576"/>
-            <a:ext cx="5572557" cy="1616042"/>
+            <a:ext cx="4499429" cy="1304835"/>
           </a:xfrm>
           <a:prstGeom prst="rect">
             <a:avLst/>
@@ -7319,7 +7361,7 @@
         </p:nvSpPr>
         <p:spPr>
           <a:xfrm>
-            <a:off x="2590800" y="221962"/>
+            <a:off x="3200400" y="221962"/>
             <a:ext cx="12496800" cy="584775"/>
           </a:xfrm>
           <a:prstGeom prst="rect">
@@ -7368,6 +7410,136 @@
           </a:p>
         </p:txBody>
       </p:sp>
+      <p:sp>
+        <p:nvSpPr>
+          <p:cNvPr id="9" name="AutoShape 2" descr="Клиент – сървър – Уикипедия"/>
+          <p:cNvSpPr>
+            <a:spLocks noChangeAspect="1" noChangeArrowheads="1"/>
+          </p:cNvSpPr>
+          <p:nvPr/>
+        </p:nvSpPr>
+        <p:spPr bwMode="auto">
+          <a:xfrm>
+            <a:off x="155575" y="-144463"/>
+            <a:ext cx="304800" cy="304801"/>
+          </a:xfrm>
+          <a:prstGeom prst="rect">
+            <a:avLst/>
+          </a:prstGeom>
+          <a:noFill/>
+          <a:extLst>
+            <a:ext uri="{909E8E84-426E-40DD-AFC4-6F175D3DCCD1}">
+              <a14:hiddenFill xmlns:a14="http://schemas.microsoft.com/office/drawing/2010/main">
+                <a:solidFill>
+                  <a:srgbClr val="FFFFFF"/>
+                </a:solidFill>
+              </a14:hiddenFill>
+            </a:ext>
+          </a:extLst>
+        </p:spPr>
+        <p:txBody>
+          <a:bodyPr vert="horz" wrap="square" lIns="91440" tIns="45720" rIns="91440" bIns="45720" numCol="1" anchor="t" anchorCtr="0" compatLnSpc="1">
+            <a:prstTxWarp prst="textNoShape">
+              <a:avLst/>
+            </a:prstTxWarp>
+          </a:bodyPr>
+          <a:lstStyle/>
+          <a:p>
+            <a:endParaRPr lang="bg-BG"/>
+          </a:p>
+        </p:txBody>
+      </p:sp>
+      <p:pic>
+        <p:nvPicPr>
+          <p:cNvPr id="1032" name="Picture 8" descr="Файл:Client-server-model.svg – Уикипедия"/>
+          <p:cNvPicPr>
+            <a:picLocks noChangeAspect="1" noChangeArrowheads="1"/>
+          </p:cNvPicPr>
+          <p:nvPr/>
+        </p:nvPicPr>
+        <p:blipFill>
+          <a:blip r:embed="rId3">
+            <a:extLst>
+              <a:ext uri="{28A0092B-C50C-407E-A947-70E740481C1C}">
+                <a14:useLocalDpi xmlns:a14="http://schemas.microsoft.com/office/drawing/2010/main" val="0"/>
+              </a:ext>
+            </a:extLst>
+          </a:blip>
+          <a:srcRect/>
+          <a:stretch>
+            <a:fillRect/>
+          </a:stretch>
+        </p:blipFill>
+        <p:spPr bwMode="auto">
+          <a:xfrm>
+            <a:off x="9144000" y="4799790"/>
+            <a:ext cx="5943600" cy="3566160"/>
+          </a:xfrm>
+          <a:prstGeom prst="rect">
+            <a:avLst/>
+          </a:prstGeom>
+          <a:ln>
+            <a:noFill/>
+          </a:ln>
+          <a:effectLst>
+            <a:outerShdw blurRad="292100" dist="139700" dir="2700000" algn="tl" rotWithShape="0">
+              <a:srgbClr val="333333">
+                <a:alpha val="65000"/>
+              </a:srgbClr>
+            </a:outerShdw>
+          </a:effectLst>
+          <a:extLst>
+            <a:ext uri="{909E8E84-426E-40DD-AFC4-6F175D3DCCD1}">
+              <a14:hiddenFill xmlns:a14="http://schemas.microsoft.com/office/drawing/2010/main">
+                <a:solidFill>
+                  <a:srgbClr val="FFFFFF"/>
+                </a:solidFill>
+              </a14:hiddenFill>
+            </a:ext>
+          </a:extLst>
+        </p:spPr>
+      </p:pic>
+      <p:pic>
+        <p:nvPicPr>
+          <p:cNvPr id="1034" name="Picture 10" descr="Create a RESTFul API with Users, JWT Authentication and permission control  using Django 1.11 &amp; DRF — Part 1 | by Andreas Pogiatzis | Medium"/>
+          <p:cNvPicPr>
+            <a:picLocks noChangeAspect="1" noChangeArrowheads="1"/>
+          </p:cNvPicPr>
+          <p:nvPr/>
+        </p:nvPicPr>
+        <p:blipFill>
+          <a:blip r:embed="rId4">
+            <a:extLst>
+              <a:ext uri="{28A0092B-C50C-407E-A947-70E740481C1C}">
+                <a14:useLocalDpi xmlns:a14="http://schemas.microsoft.com/office/drawing/2010/main" val="0"/>
+              </a:ext>
+            </a:extLst>
+          </a:blip>
+          <a:srcRect/>
+          <a:stretch>
+            <a:fillRect/>
+          </a:stretch>
+        </p:blipFill>
+        <p:spPr bwMode="auto">
+          <a:xfrm>
+            <a:off x="1828800" y="2247900"/>
+            <a:ext cx="6981825" cy="2856690"/>
+          </a:xfrm>
+          <a:prstGeom prst="rect">
+            <a:avLst/>
+          </a:prstGeom>
+          <a:noFill/>
+          <a:extLst>
+            <a:ext uri="{909E8E84-426E-40DD-AFC4-6F175D3DCCD1}">
+              <a14:hiddenFill xmlns:a14="http://schemas.microsoft.com/office/drawing/2010/main">
+                <a:solidFill>
+                  <a:srgbClr val="FFFFFF"/>
+                </a:solidFill>
+              </a14:hiddenFill>
+            </a:ext>
+          </a:extLst>
+        </p:spPr>
+      </p:pic>
     </p:spTree>
   </p:cSld>
   <p:clrMapOvr>
@@ -7567,7 +7739,7 @@
         </p:nvSpPr>
         <p:spPr>
           <a:xfrm>
-            <a:off x="1981200" y="221962"/>
+            <a:off x="3200400" y="221962"/>
             <a:ext cx="14325600" cy="584775"/>
           </a:xfrm>
           <a:prstGeom prst="rect">
@@ -7796,58 +7968,6 @@
       </p:grpSp>
       <p:sp>
         <p:nvSpPr>
-          <p:cNvPr id="8" name="Freeform 8"/>
-          <p:cNvSpPr/>
-          <p:nvPr/>
-        </p:nvSpPr>
-        <p:spPr>
-          <a:xfrm>
-            <a:off x="276042" y="6991205"/>
-            <a:ext cx="1505315" cy="498123"/>
-          </a:xfrm>
-          <a:custGeom>
-            <a:avLst/>
-            <a:gdLst/>
-            <a:ahLst/>
-            <a:cxnLst/>
-            <a:rect l="l" t="t" r="r" b="b"/>
-            <a:pathLst>
-              <a:path w="1505315" h="498123">
-                <a:moveTo>
-                  <a:pt x="0" y="0"/>
-                </a:moveTo>
-                <a:lnTo>
-                  <a:pt x="1505316" y="0"/>
-                </a:lnTo>
-                <a:lnTo>
-                  <a:pt x="1505316" y="498123"/>
-                </a:lnTo>
-                <a:lnTo>
-                  <a:pt x="0" y="498123"/>
-                </a:lnTo>
-                <a:lnTo>
-                  <a:pt x="0" y="0"/>
-                </a:lnTo>
-                <a:close/>
-              </a:path>
-            </a:pathLst>
-          </a:custGeom>
-          <a:blipFill>
-            <a:blip r:embed="rId3">
-              <a:extLst>
-                <a:ext uri="{96DAC541-7B7A-43D3-8B79-37D633B846F1}">
-                  <asvg:svgBlip xmlns:asvg="http://schemas.microsoft.com/office/drawing/2016/SVG/main" xmlns="" r:embed="rId4"/>
-                </a:ext>
-              </a:extLst>
-            </a:blip>
-            <a:stretch>
-              <a:fillRect/>
-            </a:stretch>
-          </a:blipFill>
-        </p:spPr>
-      </p:sp>
-      <p:sp>
-        <p:nvSpPr>
           <p:cNvPr id="9" name="Freeform 9"/>
           <p:cNvSpPr/>
           <p:nvPr/>
@@ -7888,7 +8008,7 @@
             <a:blip r:embed="rId3">
               <a:extLst>
                 <a:ext uri="{96DAC541-7B7A-43D3-8B79-37D633B846F1}">
-                  <asvg:svgBlip xmlns:asvg="http://schemas.microsoft.com/office/drawing/2016/SVG/main" xmlns="" r:embed="rId4"/>
+                  <asvg:svgBlip xmlns="" xmlns:asvg="http://schemas.microsoft.com/office/drawing/2016/SVG/main" r:embed="rId4"/>
                 </a:ext>
               </a:extLst>
             </a:blip>
